--- a/report/BT3041_Cold_Hot_Tumour_Presentation.pptx
+++ b/report/BT3041_Cold_Hot_Tumour_Presentation.pptx
@@ -23,6 +23,9 @@
     <p:sldId id="271" r:id="rId22"/>
     <p:sldId id="272" r:id="rId23"/>
     <p:sldId id="273" r:id="rId24"/>
+    <p:sldId id="274" r:id="rId25"/>
+    <p:sldId id="275" r:id="rId26"/>
+    <p:sldId id="276" r:id="rId27"/>
   </p:sldIdLst>
   <p:sldSz cx="12191695" cy="6858000" type="screen4x3"/>
   <p:notesSz cx="6858000" cy="9144000"/>
@@ -3156,8 +3159,8 @@
         </p:nvSpPr>
         <p:spPr>
           <a:xfrm>
-            <a:off x="685800" y="1691640"/>
-            <a:ext cx="10911535" cy="2011680"/>
+            <a:off x="608076" y="1508760"/>
+            <a:ext cx="11126419" cy="2377440"/>
           </a:xfrm>
           <a:prstGeom prst="rect">
             <a:avLst/>
@@ -3165,52 +3168,55 @@
           <a:noFill/>
         </p:spPr>
         <p:txBody>
-          <a:bodyPr wrap="square">
-            <a:spAutoFit/>
+          <a:bodyPr wrap="square" lIns="38100" rIns="38100" tIns="25400" bIns="25400">
+            <a:noAutofit/>
           </a:bodyPr>
           <a:lstStyle/>
           <a:p>
             <a:pPr algn="l"/>
             <a:r>
-              <a:rPr sz="4000" b="1">
+              <a:rPr sz="3400" b="1">
                 <a:solidFill>
                   <a:srgbClr val="FFFFFF"/>
                 </a:solidFill>
                 <a:latin typeface="Arial"/>
               </a:rPr>
-              <a:t>Cold vs Hot tumour immune phenotypes</a:t>
+              <a:t>Cold vs Hot tumour immune phenotypes from bulk RNA-seq</a:t>
+            </a:r>
+          </a:p>
+          <a:p>
+            <a:pPr>
+              <a:lnSpc>
+                <a:spcPct val="112000"/>
+              </a:lnSpc>
+              <a:spcBef>
+                <a:spcPts val="1200"/>
+              </a:spcBef>
+            </a:pPr>
+            <a:r>
+              <a:rPr sz="1500" b="0">
+                <a:solidFill>
+                  <a:srgbClr val="94A3B8"/>
+                </a:solidFill>
+                <a:latin typeface="Arial"/>
+              </a:rPr>
+              <a:t>TCGA colon (COAD) and rectum (READ) adenocarcinoma · ssGSEA + ESTIMATE labelling · hypothesis testing, dimensionality reduction, clustering, six classifiers, survival, and held-out cohort validation.</a:t>
             </a:r>
           </a:p>
           <a:p>
             <a:pPr>
               <a:spcBef>
-                <a:spcPts val="1400"/>
+                <a:spcPts val="2200"/>
               </a:spcBef>
             </a:pPr>
             <a:r>
-              <a:rPr sz="1700" b="0">
-                <a:solidFill>
-                  <a:srgbClr val="94A3B8"/>
-                </a:solidFill>
-                <a:latin typeface="Arial"/>
-              </a:rPr>
-              <a:t>Bulk RNA-seq · TCGA colorectal cancer · Multi-statistics + ML + survival</a:t>
-            </a:r>
-          </a:p>
-          <a:p>
-            <a:pPr>
-              <a:spcBef>
-                <a:spcPts val="2800"/>
-              </a:spcBef>
-            </a:pPr>
-            <a:r>
-              <a:rPr sz="1400" b="0">
+              <a:rPr sz="1200" b="0">
                 <a:solidFill>
                   <a:srgbClr val="06B6D4"/>
                 </a:solidFill>
                 <a:latin typeface="Arial"/>
               </a:rPr>
-              <a:t>BT3041 — Analysis and Interpretation of Biological Data</a:t>
+              <a:t>BT3041 — Analysis and Interpretation of Biological Data · IIT Madras · 2025–26</a:t>
             </a:r>
           </a:p>
         </p:txBody>
@@ -3223,8 +3229,8 @@
         </p:nvSpPr>
         <p:spPr>
           <a:xfrm>
-            <a:off x="0" y="2331720"/>
-            <a:ext cx="164592" cy="2148840"/>
+            <a:off x="608076" y="2148840"/>
+            <a:ext cx="128016" cy="2240280"/>
           </a:xfrm>
           <a:prstGeom prst="rect">
             <a:avLst/>
@@ -3266,8 +3272,8 @@
         </p:nvSpPr>
         <p:spPr>
           <a:xfrm>
-            <a:off x="502920" y="6510528"/>
-            <a:ext cx="11185855" cy="256032"/>
+            <a:off x="608076" y="4434840"/>
+            <a:ext cx="11126419" cy="1783080"/>
           </a:xfrm>
           <a:prstGeom prst="rect">
             <a:avLst/>
@@ -3275,20 +3281,59 @@
           <a:noFill/>
         </p:spPr>
         <p:txBody>
-          <a:bodyPr wrap="none">
-            <a:spAutoFit/>
+          <a:bodyPr wrap="square" lIns="38100" rIns="38100" tIns="25400" bIns="25400">
+            <a:noAutofit/>
           </a:bodyPr>
           <a:lstStyle/>
           <a:p>
+            <a:pPr algn="l">
+              <a:lnSpc>
+                <a:spcPct val="112000"/>
+              </a:lnSpc>
+            </a:pPr>
+            <a:r>
+              <a:rPr sz="1200" b="0">
+                <a:solidFill>
+                  <a:srgbClr val="94A3B8"/>
+                </a:solidFill>
+                <a:latin typeface="Arial"/>
+              </a:rPr>
+              <a:t>This deck summarises a full computational pipeline (10 Python modules) from raw GDC downloads to publication-style figures. Discovery cohort: 294 COAD samples; external test: 109 READ samples. All numeric results on result slides are loaded from outputs/tables when you run build_presentation.py — regenerate after re-running the pipeline.</a:t>
+            </a:r>
+          </a:p>
+        </p:txBody>
+      </p:sp>
+      <p:sp>
+        <p:nvSpPr>
+          <p:cNvPr id="6" name="TextBox 5"/>
+          <p:cNvSpPr txBox="1"/>
+          <p:nvPr/>
+        </p:nvSpPr>
+        <p:spPr>
+          <a:xfrm>
+            <a:off x="608076" y="6528816"/>
+            <a:ext cx="11126419" cy="292608"/>
+          </a:xfrm>
+          <a:prstGeom prst="rect">
+            <a:avLst/>
+          </a:prstGeom>
+          <a:noFill/>
+        </p:spPr>
+        <p:txBody>
+          <a:bodyPr wrap="square" lIns="38100" rIns="38100" tIns="25400" bIns="25400">
+            <a:noAutofit/>
+          </a:bodyPr>
+          <a:lstStyle/>
+          <a:p>
             <a:pPr algn="l"/>
             <a:r>
-              <a:rPr sz="1000" b="0">
+              <a:rPr sz="900" b="0">
                 <a:solidFill>
                   <a:srgbClr val="94A3B8"/>
                 </a:solidFill>
                 <a:latin typeface="Arial"/>
               </a:rPr>
-              <a:t>IIT Madras · Department of Biotechnology · Term project 2025–26</a:t>
+              <a:t>https://github.com/Aryan7865/cold-hot-tumour-classification</a:t>
             </a:r>
           </a:p>
         </p:txBody>
@@ -3320,7 +3365,7 @@
         <p:spPr>
           <a:xfrm>
             <a:off x="0" y="0"/>
-            <a:ext cx="82296" cy="6858000"/>
+            <a:ext cx="77724" cy="6858000"/>
           </a:xfrm>
           <a:prstGeom prst="rect">
             <a:avLst/>
@@ -3362,8 +3407,8 @@
         </p:nvSpPr>
         <p:spPr>
           <a:xfrm>
-            <a:off x="640080" y="411480"/>
-            <a:ext cx="11002975" cy="1005840"/>
+            <a:off x="608076" y="310896"/>
+            <a:ext cx="11126419" cy="804672"/>
           </a:xfrm>
           <a:prstGeom prst="rect">
             <a:avLst/>
@@ -3371,43 +3416,46 @@
           <a:noFill/>
         </p:spPr>
         <p:txBody>
-          <a:bodyPr wrap="square">
-            <a:spAutoFit/>
+          <a:bodyPr wrap="square" lIns="38100" rIns="38100" tIns="25400" bIns="25400">
+            <a:noAutofit/>
           </a:bodyPr>
           <a:lstStyle/>
           <a:p>
             <a:pPr algn="l"/>
             <a:r>
-              <a:rPr sz="2800" b="1">
+              <a:rPr sz="3000" b="1">
                 <a:solidFill>
                   <a:srgbClr val="1E293B"/>
                 </a:solidFill>
                 <a:latin typeface="Arial"/>
               </a:rPr>
-              <a:t>Clustering vs immune labels</a:t>
+              <a:t>Low-dimensional views (COAD)</a:t>
             </a:r>
           </a:p>
           <a:p>
             <a:pPr>
+              <a:lnSpc>
+                <a:spcPct val="108000"/>
+              </a:lnSpc>
               <a:spcBef>
-                <a:spcPts val="600"/>
+                <a:spcPts val="400"/>
               </a:spcBef>
             </a:pPr>
             <a:r>
-              <a:rPr sz="1300" b="0">
+              <a:rPr sz="1200" b="0">
                 <a:solidFill>
                   <a:srgbClr val="64748B"/>
                 </a:solidFill>
                 <a:latin typeface="Arial"/>
               </a:rPr>
-              <a:t>Best match: k-means k=3 → ARI 0.114, AMI 0.119, silhouette 0.137</a:t>
+              <a:t>PC1 explains 32.5% variance; PC2 9.4%; combined 42.0%</a:t>
             </a:r>
           </a:p>
         </p:txBody>
       </p:sp>
       <p:pic>
         <p:nvPicPr>
-          <p:cNvPr id="4" name="Picture 3" descr="TCGA-COAD_silhouette_sweep.png"/>
+          <p:cNvPr id="4" name="Picture 3" descr="TCGA-COAD_pca.png"/>
           <p:cNvPicPr>
             <a:picLocks noChangeAspect="1"/>
           </p:cNvPicPr>
@@ -3421,24 +3469,48 @@
         </p:blipFill>
         <p:spPr>
           <a:xfrm>
-            <a:off x="594360" y="1097280"/>
-            <a:ext cx="5806440" cy="2774356"/>
+            <a:off x="608076" y="1078992"/>
+            <a:ext cx="5490057" cy="4485133"/>
           </a:xfrm>
           <a:prstGeom prst="rect">
             <a:avLst/>
           </a:prstGeom>
         </p:spPr>
       </p:pic>
-      <p:sp>
-        <p:nvSpPr>
-          <p:cNvPr id="5" name="TextBox 4"/>
+      <p:pic>
+        <p:nvPicPr>
+          <p:cNvPr id="5" name="Picture 4" descr="TCGA-COAD_umap.png"/>
+          <p:cNvPicPr>
+            <a:picLocks noChangeAspect="1"/>
+          </p:cNvPicPr>
+          <p:nvPr/>
+        </p:nvPicPr>
+        <p:blipFill>
+          <a:blip r:embed="rId3"/>
+          <a:stretch>
+            <a:fillRect/>
+          </a:stretch>
+        </p:blipFill>
+        <p:spPr>
+          <a:xfrm>
+            <a:off x="6226149" y="1078992"/>
+            <a:ext cx="5490057" cy="4660228"/>
+          </a:xfrm>
+          <a:prstGeom prst="rect">
+            <a:avLst/>
+          </a:prstGeom>
+        </p:spPr>
+      </p:pic>
+      <p:sp>
+        <p:nvSpPr>
+          <p:cNvPr id="6" name="TextBox 5"/>
           <p:cNvSpPr txBox="1"/>
           <p:nvPr/>
         </p:nvSpPr>
         <p:spPr>
           <a:xfrm>
-            <a:off x="6492240" y="1234440"/>
-            <a:ext cx="5623560" cy="4937760"/>
+            <a:off x="608076" y="6035040"/>
+            <a:ext cx="11126419" cy="438912"/>
           </a:xfrm>
           <a:prstGeom prst="rect">
             <a:avLst/>
@@ -3446,60 +3518,38 @@
           <a:noFill/>
         </p:spPr>
         <p:txBody>
-          <a:bodyPr wrap="none">
-            <a:spAutoFit/>
+          <a:bodyPr wrap="square" lIns="38100" rIns="38100" tIns="25400" bIns="25400">
+            <a:noAutofit/>
           </a:bodyPr>
           <a:lstStyle/>
           <a:p>
             <a:pPr algn="l">
               <a:lnSpc>
-                <a:spcPct val="115000"/>
+                <a:spcPct val="112000"/>
               </a:lnSpc>
             </a:pPr>
             <a:r>
-              <a:rPr sz="1400" b="0">
-                <a:solidFill>
-                  <a:srgbClr val="1E293B"/>
-                </a:solidFill>
-                <a:latin typeface="Arial"/>
-              </a:rPr>
-              <a:t>We also ran Ward hierarchical clustering (dendrogram) and DBSCAN on PCA space.</a:t>
-            </a:r>
-            <a:br/>
-            <a:br/>
-            <a:r>
-              <a:rPr sz="1400" b="0">
-                <a:solidFill>
-                  <a:srgbClr val="1E293B"/>
-                </a:solidFill>
-                <a:latin typeface="Arial"/>
-              </a:rPr>
-              <a:t>Partial ARI/AMI means unsupervised clusters only weakly recover tertile labels — biologically reasonable because immune infiltration is continuous and Intermediate samples sit between extremes.</a:t>
-            </a:r>
-            <a:br/>
-            <a:br/>
-            <a:r>
-              <a:rPr sz="1400" b="0">
-                <a:solidFill>
-                  <a:srgbClr val="1E293B"/>
-                </a:solidFill>
-                <a:latin typeface="Arial"/>
-              </a:rPr>
-              <a:t>Silhouette sweep guides choice of k for k-means.</a:t>
-            </a:r>
-          </a:p>
-        </p:txBody>
-      </p:sp>
-      <p:sp>
-        <p:nvSpPr>
-          <p:cNvPr id="6" name="TextBox 5"/>
+              <a:rPr sz="1000" b="0">
+                <a:solidFill>
+                  <a:srgbClr val="64748B"/>
+                </a:solidFill>
+                <a:latin typeface="Arial"/>
+              </a:rPr>
+              <a:t>Left: linear PCA — Hot (red) and Cold (blue) separate along PC1, Intermediate (grey) bridges them. Right: non-linear UMAP on PCA-informed embedding — tighter islands, same colour logic. ICA, MDS (metric/non-metric), and t-SNE figures are in the repository for the same cohort.</a:t>
+            </a:r>
+          </a:p>
+        </p:txBody>
+      </p:sp>
+      <p:sp>
+        <p:nvSpPr>
+          <p:cNvPr id="7" name="TextBox 6"/>
           <p:cNvSpPr txBox="1"/>
           <p:nvPr/>
         </p:nvSpPr>
         <p:spPr>
           <a:xfrm>
-            <a:off x="502920" y="6510528"/>
-            <a:ext cx="11185855" cy="256032"/>
+            <a:off x="608076" y="6528816"/>
+            <a:ext cx="11126419" cy="292608"/>
           </a:xfrm>
           <a:prstGeom prst="rect">
             <a:avLst/>
@@ -3507,20 +3557,20 @@
           <a:noFill/>
         </p:spPr>
         <p:txBody>
-          <a:bodyPr wrap="none">
-            <a:spAutoFit/>
+          <a:bodyPr wrap="square" lIns="38100" rIns="38100" tIns="25400" bIns="25400">
+            <a:noAutofit/>
           </a:bodyPr>
           <a:lstStyle/>
           <a:p>
             <a:pPr algn="l"/>
             <a:r>
-              <a:rPr sz="1000" b="0">
+              <a:rPr sz="900" b="0">
                 <a:solidFill>
                   <a:srgbClr val="64748B"/>
                 </a:solidFill>
                 <a:latin typeface="Arial"/>
               </a:rPr>
-              <a:t>outputs/tables/clustering_metrics_TCGA-COAD.csv</a:t>
+              <a:t>outputs/figures/dim_reduction/</a:t>
             </a:r>
           </a:p>
         </p:txBody>
@@ -3552,7 +3602,7 @@
         <p:spPr>
           <a:xfrm>
             <a:off x="0" y="0"/>
-            <a:ext cx="82296" cy="6858000"/>
+            <a:ext cx="77724" cy="6858000"/>
           </a:xfrm>
           <a:prstGeom prst="rect">
             <a:avLst/>
@@ -3594,8 +3644,8 @@
         </p:nvSpPr>
         <p:spPr>
           <a:xfrm>
-            <a:off x="640080" y="411480"/>
-            <a:ext cx="11002975" cy="1005840"/>
+            <a:off x="608076" y="310896"/>
+            <a:ext cx="11126419" cy="804672"/>
           </a:xfrm>
           <a:prstGeom prst="rect">
             <a:avLst/>
@@ -3603,43 +3653,46 @@
           <a:noFill/>
         </p:spPr>
         <p:txBody>
-          <a:bodyPr wrap="square">
-            <a:spAutoFit/>
+          <a:bodyPr wrap="square" lIns="38100" rIns="38100" tIns="25400" bIns="25400">
+            <a:noAutofit/>
           </a:bodyPr>
           <a:lstStyle/>
           <a:p>
             <a:pPr algn="l"/>
             <a:r>
-              <a:rPr sz="2800" b="1">
+              <a:rPr sz="3000" b="1">
                 <a:solidFill>
                   <a:srgbClr val="1E293B"/>
                 </a:solidFill>
                 <a:latin typeface="Arial"/>
               </a:rPr>
-              <a:t>Differential expression &amp; multiple testing</a:t>
+              <a:t>Unsupervised clustering vs ssGSEA labels</a:t>
             </a:r>
           </a:p>
           <a:p>
             <a:pPr>
+              <a:lnSpc>
+                <a:spcPct val="108000"/>
+              </a:lnSpc>
               <a:spcBef>
-                <a:spcPts val="600"/>
+                <a:spcPts val="400"/>
               </a:spcBef>
             </a:pPr>
             <a:r>
-              <a:rPr sz="1300" b="0">
+              <a:rPr sz="1200" b="0">
                 <a:solidFill>
                   <a:srgbClr val="64748B"/>
                 </a:solidFill>
                 <a:latin typeface="Arial"/>
               </a:rPr>
-              <a:t>Genes with BH q&lt;0.05 (Welch t): 8,198 · ANOVA: 10,369 · Kruskal–Wallis: 10,280 · Mann–Whitney: 8,362</a:t>
+              <a:t>k-means k=3: ARI 0.114, AMI 0.119, silhouette 0.137</a:t>
             </a:r>
           </a:p>
         </p:txBody>
       </p:sp>
       <p:pic>
         <p:nvPicPr>
-          <p:cNvPr id="4" name="Picture 3" descr="volcano_TCGA-COAD.png"/>
+          <p:cNvPr id="4" name="Picture 3" descr="TCGA-COAD_silhouette_sweep.png"/>
           <p:cNvPicPr>
             <a:picLocks noChangeAspect="1"/>
           </p:cNvPicPr>
@@ -3653,8 +3706,8 @@
         </p:blipFill>
         <p:spPr>
           <a:xfrm>
-            <a:off x="594360" y="1691640"/>
-            <a:ext cx="6380689" cy="4709160"/>
+            <a:off x="608076" y="1078992"/>
+            <a:ext cx="5916826" cy="2827099"/>
           </a:xfrm>
           <a:prstGeom prst="rect">
             <a:avLst/>
@@ -3669,8 +3722,8 @@
         </p:nvSpPr>
         <p:spPr>
           <a:xfrm>
-            <a:off x="612648" y="1170432"/>
-            <a:ext cx="11185855" cy="502920"/>
+            <a:off x="6671206" y="1078992"/>
+            <a:ext cx="5063288" cy="5404104"/>
           </a:xfrm>
           <a:prstGeom prst="rect">
             <a:avLst/>
@@ -3678,24 +3731,46 @@
           <a:noFill/>
         </p:spPr>
         <p:txBody>
-          <a:bodyPr wrap="none">
-            <a:spAutoFit/>
+          <a:bodyPr wrap="square" lIns="38100" rIns="38100" tIns="25400" bIns="25400">
+            <a:noAutofit/>
           </a:bodyPr>
           <a:lstStyle/>
           <a:p>
             <a:pPr algn="l">
               <a:lnSpc>
-                <a:spcPct val="115000"/>
+                <a:spcPct val="112000"/>
               </a:lnSpc>
             </a:pPr>
             <a:r>
-              <a:rPr sz="1200" b="0">
-                <a:solidFill>
-                  <a:srgbClr val="64748B"/>
-                </a:solidFill>
-                <a:latin typeface="Arial"/>
-              </a:rPr>
-              <a:t>High-confidence DE (BH + |log₂FC|&gt;1): 2,269 genes — see heatmap_top40 in repo.</a:t>
+              <a:rPr sz="1100" b="0">
+                <a:solidFill>
+                  <a:srgbClr val="1E293B"/>
+                </a:solidFill>
+                <a:latin typeface="Arial"/>
+              </a:rPr>
+              <a:t>Silhouette scores peak in the k=2–4 range; we report ARI/AMI against labels for several algorithms and cluster counts in clustering_metrics_TCGA-COAD.csv.</a:t>
+            </a:r>
+            <a:br/>
+            <a:br/>
+            <a:r>
+              <a:rPr sz="1100" b="0">
+                <a:solidFill>
+                  <a:srgbClr val="1E293B"/>
+                </a:solidFill>
+                <a:latin typeface="Arial"/>
+              </a:rPr>
+              <a:t>Moderate ARI (~0.11) means unsupervised partitions only partially reproduce tertile labels. That is expected: tertiles impose crisp boundaries on a continuous immune axis; k-means also forces equal variance spherical clusters in feature space after PCA.</a:t>
+            </a:r>
+            <a:br/>
+            <a:br/>
+            <a:r>
+              <a:rPr sz="1100" b="0">
+                <a:solidFill>
+                  <a:srgbClr val="1E293B"/>
+                </a:solidFill>
+                <a:latin typeface="Arial"/>
+              </a:rPr>
+              <a:t>Hierarchical clustering provides a dendrogram for visual inspection of sample–sample similarity; DBSCAN serves as a density-based contrast that does not fix k. Together they satisfy the course clustering requirement beyond a single k-means run.</a:t>
             </a:r>
           </a:p>
         </p:txBody>
@@ -3708,8 +3783,8 @@
         </p:nvSpPr>
         <p:spPr>
           <a:xfrm>
-            <a:off x="502920" y="6510528"/>
-            <a:ext cx="11185855" cy="256032"/>
+            <a:off x="608076" y="6528816"/>
+            <a:ext cx="11126419" cy="292608"/>
           </a:xfrm>
           <a:prstGeom prst="rect">
             <a:avLst/>
@@ -3717,20 +3792,20 @@
           <a:noFill/>
         </p:spPr>
         <p:txBody>
-          <a:bodyPr wrap="none">
-            <a:spAutoFit/>
+          <a:bodyPr wrap="square" lIns="38100" rIns="38100" tIns="25400" bIns="25400">
+            <a:noAutofit/>
           </a:bodyPr>
           <a:lstStyle/>
           <a:p>
             <a:pPr algn="l"/>
             <a:r>
-              <a:rPr sz="1000" b="0">
+              <a:rPr sz="900" b="0">
                 <a:solidFill>
                   <a:srgbClr val="64748B"/>
                 </a:solidFill>
                 <a:latin typeface="Arial"/>
               </a:rPr>
-              <a:t>Bonferroni-corrected p-values also stored per test in dge_TCGA-COAD.csv</a:t>
+              <a:t>outputs/tables/clustering_metrics_TCGA-COAD.csv</a:t>
             </a:r>
           </a:p>
         </p:txBody>
@@ -3762,7 +3837,7 @@
         <p:spPr>
           <a:xfrm>
             <a:off x="0" y="0"/>
-            <a:ext cx="82296" cy="6858000"/>
+            <a:ext cx="77724" cy="6858000"/>
           </a:xfrm>
           <a:prstGeom prst="rect">
             <a:avLst/>
@@ -3804,8 +3879,8 @@
         </p:nvSpPr>
         <p:spPr>
           <a:xfrm>
-            <a:off x="640080" y="411480"/>
-            <a:ext cx="11002975" cy="1005840"/>
+            <a:off x="608076" y="310896"/>
+            <a:ext cx="11126419" cy="804672"/>
           </a:xfrm>
           <a:prstGeom prst="rect">
             <a:avLst/>
@@ -3813,43 +3888,96 @@
           <a:noFill/>
         </p:spPr>
         <p:txBody>
-          <a:bodyPr wrap="square">
-            <a:spAutoFit/>
+          <a:bodyPr wrap="square" lIns="38100" rIns="38100" tIns="25400" bIns="25400">
+            <a:noAutofit/>
           </a:bodyPr>
           <a:lstStyle/>
           <a:p>
             <a:pPr algn="l"/>
             <a:r>
-              <a:rPr sz="2800" b="1">
+              <a:rPr sz="3000" b="1">
                 <a:solidFill>
                   <a:srgbClr val="1E293B"/>
                 </a:solidFill>
                 <a:latin typeface="Arial"/>
               </a:rPr>
-              <a:t>Top DE genes (heatmap)</a:t>
+              <a:t>Differential expression &amp; FDR</a:t>
             </a:r>
           </a:p>
           <a:p>
             <a:pPr>
+              <a:lnSpc>
+                <a:spcPct val="108000"/>
+              </a:lnSpc>
               <a:spcBef>
-                <a:spcPts val="600"/>
+                <a:spcPts val="400"/>
               </a:spcBef>
             </a:pPr>
             <a:r>
-              <a:rPr sz="1300" b="0">
+              <a:rPr sz="1200" b="0">
                 <a:solidFill>
                   <a:srgbClr val="64748B"/>
                 </a:solidFill>
                 <a:latin typeface="Arial"/>
               </a:rPr>
-              <a:t>Z-scored rows · columns ordered by immune label</a:t>
+              <a:t>Per-gene testing on TCGA-COAD</a:t>
+            </a:r>
+          </a:p>
+        </p:txBody>
+      </p:sp>
+      <p:sp>
+        <p:nvSpPr>
+          <p:cNvPr id="4" name="TextBox 3"/>
+          <p:cNvSpPr txBox="1"/>
+          <p:nvPr/>
+        </p:nvSpPr>
+        <p:spPr>
+          <a:xfrm>
+            <a:off x="608076" y="1078992"/>
+            <a:ext cx="11126419" cy="1261872"/>
+          </a:xfrm>
+          <a:prstGeom prst="rect">
+            <a:avLst/>
+          </a:prstGeom>
+          <a:noFill/>
+        </p:spPr>
+        <p:txBody>
+          <a:bodyPr wrap="square" lIns="38100" rIns="38100" tIns="25400" bIns="25400">
+            <a:noAutofit/>
+          </a:bodyPr>
+          <a:lstStyle/>
+          <a:p>
+            <a:pPr algn="l">
+              <a:lnSpc>
+                <a:spcPct val="112000"/>
+              </a:lnSpc>
+            </a:pPr>
+            <a:r>
+              <a:rPr sz="1100" b="0">
+                <a:solidFill>
+                  <a:srgbClr val="1E293B"/>
+                </a:solidFill>
+                <a:latin typeface="Arial"/>
+              </a:rPr>
+              <a:t>Genes tested: 16,723. Significant at BH FDR q&lt;0.05 — Welch t: 8,198; one-way ANOVA: 10,369; Kruskal–Wallis: 10,280; Mann–Whitney U: 8,362. Stringent DE list (BH on t-test plus |log₂FC|&gt;1): 2,269 genes.</a:t>
+            </a:r>
+            <a:br/>
+            <a:br/>
+            <a:r>
+              <a:rPr sz="1100" b="0">
+                <a:solidFill>
+                  <a:srgbClr val="1E293B"/>
+                </a:solidFill>
+                <a:latin typeface="Arial"/>
+              </a:rPr>
+              <a:t>Volcano: x-axis log₂ fold-change (Hot − Cold); y-axis −log₁₀(BH q). Red points pass both magnitude and FDR thresholds. Grey cloud = not significant after correction.</a:t>
             </a:r>
           </a:p>
         </p:txBody>
       </p:sp>
       <p:pic>
         <p:nvPicPr>
-          <p:cNvPr id="4" name="Picture 3" descr="heatmap_top40_TCGA-COAD.png"/>
+          <p:cNvPr id="5" name="Picture 4" descr="volcano_TCGA-COAD.png"/>
           <p:cNvPicPr>
             <a:picLocks noChangeAspect="1"/>
           </p:cNvPicPr>
@@ -3863,8 +3991,8 @@
         </p:blipFill>
         <p:spPr>
           <a:xfrm>
-            <a:off x="594360" y="1051560"/>
-            <a:ext cx="7882241" cy="5440680"/>
+            <a:off x="608076" y="2395728"/>
+            <a:ext cx="5550580" cy="4096512"/>
           </a:xfrm>
           <a:prstGeom prst="rect">
             <a:avLst/>
@@ -3873,14 +4001,14 @@
       </p:pic>
       <p:sp>
         <p:nvSpPr>
-          <p:cNvPr id="5" name="TextBox 4"/>
+          <p:cNvPr id="6" name="TextBox 5"/>
           <p:cNvSpPr txBox="1"/>
           <p:nvPr/>
         </p:nvSpPr>
         <p:spPr>
           <a:xfrm>
-            <a:off x="502920" y="6510528"/>
-            <a:ext cx="11185855" cy="256032"/>
+            <a:off x="608076" y="6528816"/>
+            <a:ext cx="11126419" cy="292608"/>
           </a:xfrm>
           <a:prstGeom prst="rect">
             <a:avLst/>
@@ -3888,20 +4016,20 @@
           <a:noFill/>
         </p:spPr>
         <p:txBody>
-          <a:bodyPr wrap="none">
-            <a:spAutoFit/>
+          <a:bodyPr wrap="square" lIns="38100" rIns="38100" tIns="25400" bIns="25400">
+            <a:noAutofit/>
           </a:bodyPr>
           <a:lstStyle/>
           <a:p>
             <a:pPr algn="l"/>
             <a:r>
-              <a:rPr sz="1000" b="0">
+              <a:rPr sz="900" b="0">
                 <a:solidFill>
                   <a:srgbClr val="64748B"/>
                 </a:solidFill>
                 <a:latin typeface="Arial"/>
               </a:rPr>
-              <a:t>Biology: strong MHC class II and cytotoxic / NK-associated genes among top hits — matches published hot signatures</a:t>
+              <a:t>outputs/tables/dge_TCGA-COAD.csv · dge_sig_TCGA-COAD.csv</a:t>
             </a:r>
           </a:p>
         </p:txBody>
@@ -3933,7 +4061,7 @@
         <p:spPr>
           <a:xfrm>
             <a:off x="0" y="0"/>
-            <a:ext cx="82296" cy="6858000"/>
+            <a:ext cx="77724" cy="6858000"/>
           </a:xfrm>
           <a:prstGeom prst="rect">
             <a:avLst/>
@@ -3975,8 +4103,8 @@
         </p:nvSpPr>
         <p:spPr>
           <a:xfrm>
-            <a:off x="640080" y="411480"/>
-            <a:ext cx="11002975" cy="1005840"/>
+            <a:off x="608076" y="310896"/>
+            <a:ext cx="11126419" cy="804672"/>
           </a:xfrm>
           <a:prstGeom prst="rect">
             <a:avLst/>
@@ -3984,43 +4112,85 @@
           <a:noFill/>
         </p:spPr>
         <p:txBody>
-          <a:bodyPr wrap="square">
-            <a:spAutoFit/>
+          <a:bodyPr wrap="square" lIns="38100" rIns="38100" tIns="25400" bIns="25400">
+            <a:noAutofit/>
           </a:bodyPr>
           <a:lstStyle/>
           <a:p>
             <a:pPr algn="l"/>
             <a:r>
-              <a:rPr sz="2800" b="1">
+              <a:rPr sz="3000" b="1">
                 <a:solidFill>
                   <a:srgbClr val="1E293B"/>
                 </a:solidFill>
                 <a:latin typeface="Arial"/>
               </a:rPr>
-              <a:t>Supervised learning (TCGA-COAD)</a:t>
+              <a:t>Top ranked DE genes (heatmap)</a:t>
             </a:r>
           </a:p>
           <a:p>
             <a:pPr>
+              <a:lnSpc>
+                <a:spcPct val="108000"/>
+              </a:lnSpc>
               <a:spcBef>
-                <a:spcPts val="600"/>
+                <a:spcPts val="400"/>
               </a:spcBef>
             </a:pPr>
             <a:r>
-              <a:rPr sz="1300" b="0">
+              <a:rPr sz="1200" b="0">
                 <a:solidFill>
                   <a:srgbClr val="64748B"/>
                 </a:solidFill>
                 <a:latin typeface="Arial"/>
               </a:rPr>
-              <a:t>Six models · 5-fold stratified CV · best by balanced accuracy: RandomForest</a:t>
+              <a:t>Forty genes with strongest evidence · z-scored across samples</a:t>
+            </a:r>
+          </a:p>
+        </p:txBody>
+      </p:sp>
+      <p:sp>
+        <p:nvSpPr>
+          <p:cNvPr id="4" name="TextBox 3"/>
+          <p:cNvSpPr txBox="1"/>
+          <p:nvPr/>
+        </p:nvSpPr>
+        <p:spPr>
+          <a:xfrm>
+            <a:off x="608076" y="1078992"/>
+            <a:ext cx="11126419" cy="658368"/>
+          </a:xfrm>
+          <a:prstGeom prst="rect">
+            <a:avLst/>
+          </a:prstGeom>
+          <a:noFill/>
+        </p:spPr>
+        <p:txBody>
+          <a:bodyPr wrap="square" lIns="38100" rIns="38100" tIns="25400" bIns="25400">
+            <a:noAutofit/>
+          </a:bodyPr>
+          <a:lstStyle/>
+          <a:p>
+            <a:pPr algn="l">
+              <a:lnSpc>
+                <a:spcPct val="112000"/>
+              </a:lnSpc>
+            </a:pPr>
+            <a:r>
+              <a:rPr sz="1000" b="0">
+                <a:solidFill>
+                  <a:srgbClr val="64748B"/>
+                </a:solidFill>
+                <a:latin typeface="Arial"/>
+              </a:rPr>
+              <a:t>Columns ordered by immune class; colour = row z-score. Sharp red/blue blocks indicate genes that track Hot vs Cold consistently across patients — candidate biomarkers and pathway-level hypotheses.</a:t>
             </a:r>
           </a:p>
         </p:txBody>
       </p:sp>
       <p:pic>
         <p:nvPicPr>
-          <p:cNvPr id="4" name="Picture 3" descr="TCGA-COAD_model_comparison.png"/>
+          <p:cNvPr id="5" name="Picture 4" descr="heatmap_top40_TCGA-COAD.png"/>
           <p:cNvPicPr>
             <a:picLocks noChangeAspect="1"/>
           </p:cNvPicPr>
@@ -4034,104 +4204,14 @@
         </p:blipFill>
         <p:spPr>
           <a:xfrm>
-            <a:off x="594360" y="1097280"/>
-            <a:ext cx="5897880" cy="3212238"/>
+            <a:off x="608076" y="1792224"/>
+            <a:ext cx="6742959" cy="4654296"/>
           </a:xfrm>
           <a:prstGeom prst="rect">
             <a:avLst/>
           </a:prstGeom>
         </p:spPr>
       </p:pic>
-      <p:sp>
-        <p:nvSpPr>
-          <p:cNvPr id="5" name="TextBox 4"/>
-          <p:cNvSpPr txBox="1"/>
-          <p:nvPr/>
-        </p:nvSpPr>
-        <p:spPr>
-          <a:xfrm>
-            <a:off x="6556248" y="1234440"/>
-            <a:ext cx="5486400" cy="5029200"/>
-          </a:xfrm>
-          <a:prstGeom prst="rect">
-            <a:avLst/>
-          </a:prstGeom>
-          <a:noFill/>
-        </p:spPr>
-        <p:txBody>
-          <a:bodyPr wrap="none">
-            <a:spAutoFit/>
-          </a:bodyPr>
-          <a:lstStyle/>
-          <a:p>
-            <a:pPr algn="l">
-              <a:lnSpc>
-                <a:spcPct val="115000"/>
-              </a:lnSpc>
-            </a:pPr>
-            <a:r>
-              <a:rPr sz="1400" b="0">
-                <a:solidFill>
-                  <a:srgbClr val="1E293B"/>
-                </a:solidFill>
-                <a:latin typeface="Arial"/>
-              </a:rPr>
-              <a:t>Best model (RandomForest):</a:t>
-            </a:r>
-            <a:br/>
-            <a:r>
-              <a:rPr sz="1400" b="0">
-                <a:solidFill>
-                  <a:srgbClr val="1E293B"/>
-                </a:solidFill>
-                <a:latin typeface="Arial"/>
-              </a:rPr>
-              <a:t>  • Balanced accuracy (mean) = 0.785</a:t>
-            </a:r>
-            <a:br/>
-            <a:r>
-              <a:rPr sz="1400" b="0">
-                <a:solidFill>
-                  <a:srgbClr val="1E293B"/>
-                </a:solidFill>
-                <a:latin typeface="Arial"/>
-              </a:rPr>
-              <a:t>  • Accuracy (mean)         = 0.786</a:t>
-            </a:r>
-            <a:br/>
-            <a:r>
-              <a:rPr sz="1400" b="0">
-                <a:solidFill>
-                  <a:srgbClr val="1E293B"/>
-                </a:solidFill>
-                <a:latin typeface="Arial"/>
-              </a:rPr>
-              <a:t>  • Macro F1 (mean)         = 0.786</a:t>
-            </a:r>
-            <a:br/>
-            <a:br/>
-            <a:r>
-              <a:rPr sz="1400" b="0">
-                <a:solidFill>
-                  <a:srgbClr val="1E293B"/>
-                </a:solidFill>
-                <a:latin typeface="Arial"/>
-              </a:rPr>
-              <a:t>Models compared: kNN-5, SVM-linear, SVM-RBF, Logistic, RandomForest, XGBoost.</a:t>
-            </a:r>
-            <a:br/>
-            <a:r>
-              <a:rPr sz="1400" b="0">
-                <a:solidFill>
-                  <a:srgbClr val="1E293B"/>
-                </a:solidFill>
-                <a:latin typeface="Arial"/>
-              </a:rPr>
-              <a:t>Pipeline: StandardScaler (where used) + SelectKBest(ANOVA, k=500) + classifier.</a:t>
-            </a:r>
-          </a:p>
-        </p:txBody>
-      </p:sp>
       <p:sp>
         <p:nvSpPr>
           <p:cNvPr id="6" name="TextBox 5"/>
@@ -4140,8 +4220,8 @@
         </p:nvSpPr>
         <p:spPr>
           <a:xfrm>
-            <a:off x="502920" y="6510528"/>
-            <a:ext cx="11185855" cy="256032"/>
+            <a:off x="608076" y="6528816"/>
+            <a:ext cx="11126419" cy="292608"/>
           </a:xfrm>
           <a:prstGeom prst="rect">
             <a:avLst/>
@@ -4149,20 +4229,20 @@
           <a:noFill/>
         </p:spPr>
         <p:txBody>
-          <a:bodyPr wrap="none">
-            <a:spAutoFit/>
+          <a:bodyPr wrap="square" lIns="38100" rIns="38100" tIns="25400" bIns="25400">
+            <a:noAutofit/>
           </a:bodyPr>
           <a:lstStyle/>
           <a:p>
             <a:pPr algn="l"/>
             <a:r>
-              <a:rPr sz="1000" b="0">
+              <a:rPr sz="900" b="0">
                 <a:solidFill>
                   <a:srgbClr val="64748B"/>
                 </a:solidFill>
                 <a:latin typeface="Arial"/>
               </a:rPr>
-              <a:t>outputs/tables/cv_results_TCGA-COAD.csv</a:t>
+              <a:t>outputs/figures/hypothesis/heatmap_top40_TCGA-COAD.png</a:t>
             </a:r>
           </a:p>
         </p:txBody>
@@ -4194,7 +4274,7 @@
         <p:spPr>
           <a:xfrm>
             <a:off x="0" y="0"/>
-            <a:ext cx="82296" cy="6858000"/>
+            <a:ext cx="77724" cy="6858000"/>
           </a:xfrm>
           <a:prstGeom prst="rect">
             <a:avLst/>
@@ -4236,8 +4316,8 @@
         </p:nvSpPr>
         <p:spPr>
           <a:xfrm>
-            <a:off x="640080" y="411480"/>
-            <a:ext cx="11002975" cy="1005840"/>
+            <a:off x="608076" y="310896"/>
+            <a:ext cx="11126419" cy="804672"/>
           </a:xfrm>
           <a:prstGeom prst="rect">
             <a:avLst/>
@@ -4245,98 +4325,53 @@
           <a:noFill/>
         </p:spPr>
         <p:txBody>
-          <a:bodyPr wrap="square">
-            <a:spAutoFit/>
+          <a:bodyPr wrap="square" lIns="38100" rIns="38100" tIns="25400" bIns="25400">
+            <a:noAutofit/>
           </a:bodyPr>
           <a:lstStyle/>
           <a:p>
             <a:pPr algn="l"/>
             <a:r>
-              <a:rPr sz="2800" b="1">
+              <a:rPr sz="3000" b="1">
                 <a:solidFill>
                   <a:srgbClr val="1E293B"/>
                 </a:solidFill>
                 <a:latin typeface="Arial"/>
               </a:rPr>
-              <a:t>Classifier behaviour (best model)</a:t>
+              <a:t>Biological interpretation</a:t>
             </a:r>
           </a:p>
           <a:p>
             <a:pPr>
+              <a:lnSpc>
+                <a:spcPct val="108000"/>
+              </a:lnSpc>
               <a:spcBef>
-                <a:spcPts val="600"/>
+                <a:spcPts val="400"/>
               </a:spcBef>
             </a:pPr>
             <a:r>
-              <a:rPr sz="1300" b="0">
+              <a:rPr sz="1200" b="0">
                 <a:solidFill>
                   <a:srgbClr val="64748B"/>
                 </a:solidFill>
                 <a:latin typeface="Arial"/>
               </a:rPr>
-              <a:t>Cross-validated predictions on COAD</a:t>
-            </a:r>
-          </a:p>
-        </p:txBody>
-      </p:sp>
-      <p:pic>
-        <p:nvPicPr>
-          <p:cNvPr id="4" name="Picture 3" descr="TCGA-COAD_RandomForest_confmat.png"/>
-          <p:cNvPicPr>
-            <a:picLocks noChangeAspect="1"/>
-          </p:cNvPicPr>
-          <p:nvPr/>
-        </p:nvPicPr>
-        <p:blipFill>
-          <a:blip r:embed="rId2"/>
-          <a:stretch>
-            <a:fillRect/>
-          </a:stretch>
-        </p:blipFill>
-        <p:spPr>
-          <a:xfrm>
-            <a:off x="557784" y="1051560"/>
-            <a:ext cx="5446623" cy="3322440"/>
-          </a:xfrm>
-          <a:prstGeom prst="rect">
-            <a:avLst/>
-          </a:prstGeom>
-        </p:spPr>
-      </p:pic>
-      <p:pic>
-        <p:nvPicPr>
-          <p:cNvPr id="5" name="Picture 4" descr="TCGA-COAD_RandomForest_roc.png"/>
-          <p:cNvPicPr>
-            <a:picLocks noChangeAspect="1"/>
-          </p:cNvPicPr>
-          <p:nvPr/>
-        </p:nvPicPr>
-        <p:blipFill>
-          <a:blip r:embed="rId3"/>
-          <a:stretch>
-            <a:fillRect/>
-          </a:stretch>
-        </p:blipFill>
-        <p:spPr>
-          <a:xfrm>
-            <a:off x="6114135" y="1051560"/>
-            <a:ext cx="5446623" cy="4101125"/>
-          </a:xfrm>
-          <a:prstGeom prst="rect">
-            <a:avLst/>
-          </a:prstGeom>
-        </p:spPr>
-      </p:pic>
-      <p:sp>
-        <p:nvSpPr>
-          <p:cNvPr id="6" name="TextBox 5"/>
+              <a:t>Concordance with published immune-infiltration biology</a:t>
+            </a:r>
+          </a:p>
+        </p:txBody>
+      </p:sp>
+      <p:sp>
+        <p:nvSpPr>
+          <p:cNvPr id="4" name="TextBox 3"/>
           <p:cNvSpPr txBox="1"/>
           <p:nvPr/>
         </p:nvSpPr>
         <p:spPr>
           <a:xfrm>
-            <a:off x="502920" y="6510528"/>
-            <a:ext cx="11185855" cy="256032"/>
+            <a:off x="608076" y="1078992"/>
+            <a:ext cx="11126419" cy="5404104"/>
           </a:xfrm>
           <a:prstGeom prst="rect">
             <a:avLst/>
@@ -4344,20 +4379,81 @@
           <a:noFill/>
         </p:spPr>
         <p:txBody>
-          <a:bodyPr wrap="none">
-            <a:spAutoFit/>
+          <a:bodyPr wrap="square" lIns="38100" rIns="38100" tIns="25400" bIns="25400">
+            <a:noAutofit/>
           </a:bodyPr>
           <a:lstStyle/>
           <a:p>
+            <a:pPr algn="l">
+              <a:lnSpc>
+                <a:spcPct val="112000"/>
+              </a:lnSpc>
+            </a:pPr>
+            <a:r>
+              <a:rPr sz="1100" b="0">
+                <a:solidFill>
+                  <a:srgbClr val="1E293B"/>
+                </a:solidFill>
+                <a:latin typeface="Arial"/>
+              </a:rPr>
+              <a:t>Among the strongest Hot-associated genes after multiple-testing correction and effect-size filtering are examples such as: HLA-DPB1, HLA-DRA, CD48, PLA2G2D, HLA-DMB, HLA-DPA1, HLA-DQA1, C1QB, HLA-DOA, SLAMF7, …</a:t>
+            </a:r>
+            <a:br/>
+            <a:br/>
+            <a:r>
+              <a:rPr sz="1100" b="0">
+                <a:solidFill>
+                  <a:srgbClr val="1E293B"/>
+                </a:solidFill>
+                <a:latin typeface="Arial"/>
+              </a:rPr>
+              <a:t>These include MHC class II antigen presentation (HLA-DRA, HLA-DPB1, …), complement cascade (C1QB), lymphocyte signalling (CD48, SLAMF7), and cytotoxic / tissue-resident programmes (GZMK, CXCL13). That pattern matches known biology of T-cell–inflamed tumours and supports the face validity of our ssGSEA-based labels — not random gene noise.</a:t>
+            </a:r>
+            <a:br/>
+            <a:br/>
+            <a:r>
+              <a:rPr sz="1100" b="0">
+                <a:solidFill>
+                  <a:srgbClr val="1E293B"/>
+                </a:solidFill>
+                <a:latin typeface="Arial"/>
+              </a:rPr>
+              <a:t>We did not run a separate Fisher pathway table in the final deck, but ssGSEA itself is gene-set–centric; optional extension: hypergeometric over-representation on MSigDB Hallmarks for the DE gene list.</a:t>
+            </a:r>
+          </a:p>
+        </p:txBody>
+      </p:sp>
+      <p:sp>
+        <p:nvSpPr>
+          <p:cNvPr id="5" name="TextBox 4"/>
+          <p:cNvSpPr txBox="1"/>
+          <p:nvPr/>
+        </p:nvSpPr>
+        <p:spPr>
+          <a:xfrm>
+            <a:off x="608076" y="6528816"/>
+            <a:ext cx="11126419" cy="292608"/>
+          </a:xfrm>
+          <a:prstGeom prst="rect">
+            <a:avLst/>
+          </a:prstGeom>
+          <a:noFill/>
+        </p:spPr>
+        <p:txBody>
+          <a:bodyPr wrap="square" lIns="38100" rIns="38100" tIns="25400" bIns="25400">
+            <a:noAutofit/>
+          </a:bodyPr>
+          <a:lstStyle/>
+          <a:p>
             <a:pPr algn="l"/>
             <a:r>
-              <a:rPr sz="1000" b="0">
+              <a:rPr sz="900" b="0">
                 <a:solidFill>
                   <a:srgbClr val="64748B"/>
                 </a:solidFill>
                 <a:latin typeface="Arial"/>
               </a:rPr>
-              <a:t>OvR ROC AUC values printed in legend inside figure files</a:t>
+              <a:t>Compare e.g. Bindea et al., Immunity 2013; Charoentong pan-cancer immune clusters</a:t>
             </a:r>
           </a:p>
         </p:txBody>
@@ -4389,7 +4485,7 @@
         <p:spPr>
           <a:xfrm>
             <a:off x="0" y="0"/>
-            <a:ext cx="82296" cy="6858000"/>
+            <a:ext cx="77724" cy="6858000"/>
           </a:xfrm>
           <a:prstGeom prst="rect">
             <a:avLst/>
@@ -4431,8 +4527,8 @@
         </p:nvSpPr>
         <p:spPr>
           <a:xfrm>
-            <a:off x="640080" y="411480"/>
-            <a:ext cx="11002975" cy="1005840"/>
+            <a:off x="608076" y="310896"/>
+            <a:ext cx="11126419" cy="804672"/>
           </a:xfrm>
           <a:prstGeom prst="rect">
             <a:avLst/>
@@ -4440,8 +4536,8 @@
           <a:noFill/>
         </p:spPr>
         <p:txBody>
-          <a:bodyPr wrap="square">
-            <a:spAutoFit/>
+          <a:bodyPr wrap="square" lIns="38100" rIns="38100" tIns="25400" bIns="25400">
+            <a:noAutofit/>
           </a:bodyPr>
           <a:lstStyle/>
           <a:p>
@@ -4453,30 +4549,33 @@
                 </a:solidFill>
                 <a:latin typeface="Arial"/>
               </a:rPr>
-              <a:t>External validation — train COAD, test READ</a:t>
+              <a:t>Supervised classification (discovery cohort)</a:t>
             </a:r>
           </a:p>
           <a:p>
             <a:pPr>
+              <a:lnSpc>
+                <a:spcPct val="108000"/>
+              </a:lnSpc>
               <a:spcBef>
-                <a:spcPts val="600"/>
+                <a:spcPts val="400"/>
               </a:spcBef>
             </a:pPr>
             <a:r>
-              <a:rPr sz="1300" b="0">
+              <a:rPr sz="1200" b="0">
                 <a:solidFill>
                   <a:srgbClr val="64748B"/>
                 </a:solidFill>
                 <a:latin typeface="Arial"/>
               </a:rPr>
-              <a:t>Frozen RandomForest · n = 109 · never used in training</a:t>
+              <a:t>294 COAD samples · stratified 5-fold CV · six algorithms</a:t>
             </a:r>
           </a:p>
         </p:txBody>
       </p:sp>
       <p:pic>
         <p:nvPicPr>
-          <p:cNvPr id="4" name="Picture 3" descr="validation_confmat_TCGA-READ.png"/>
+          <p:cNvPr id="4" name="Picture 3" descr="TCGA-COAD_model_comparison.png"/>
           <p:cNvPicPr>
             <a:picLocks noChangeAspect="1"/>
           </p:cNvPicPr>
@@ -4490,8 +4589,8 @@
         </p:blipFill>
         <p:spPr>
           <a:xfrm>
-            <a:off x="594360" y="1691640"/>
-            <a:ext cx="5669280" cy="4223113"/>
+            <a:off x="608076" y="1078992"/>
+            <a:ext cx="5698869" cy="3103848"/>
           </a:xfrm>
           <a:prstGeom prst="rect">
             <a:avLst/>
@@ -4506,8 +4605,8 @@
         </p:nvSpPr>
         <p:spPr>
           <a:xfrm>
-            <a:off x="6400800" y="1234440"/>
-            <a:ext cx="5806440" cy="5120640"/>
+            <a:off x="6444105" y="1078992"/>
+            <a:ext cx="5290389" cy="5404104"/>
           </a:xfrm>
           <a:prstGeom prst="rect">
             <a:avLst/>
@@ -4515,66 +4614,126 @@
           <a:noFill/>
         </p:spPr>
         <p:txBody>
-          <a:bodyPr wrap="none">
-            <a:spAutoFit/>
+          <a:bodyPr wrap="square" lIns="38100" rIns="38100" tIns="25400" bIns="25400">
+            <a:noAutofit/>
           </a:bodyPr>
           <a:lstStyle/>
           <a:p>
             <a:pPr algn="l">
               <a:lnSpc>
-                <a:spcPct val="115000"/>
+                <a:spcPct val="112000"/>
               </a:lnSpc>
             </a:pPr>
             <a:r>
-              <a:rPr sz="1500" b="0">
+              <a:rPr sz="1000" b="0">
                 <a:solidFill>
                   <a:srgbClr val="1E293B"/>
                 </a:solidFill>
                 <a:latin typeface="Arial"/>
               </a:rPr>
-              <a:t>Held-out cohort metrics (same gene-space alignment; missing training genes zero-filled):</a:t>
+              <a:t>Leader by mean balanced accuracy: RandomForest (balanced acc 0.785, accuracy 0.786, macro-F1 0.786).</a:t>
             </a:r>
             <a:br/>
             <a:br/>
             <a:r>
-              <a:rPr sz="1500" b="0">
+              <a:rPr sz="1000" b="0">
                 <a:solidFill>
                   <a:srgbClr val="1E293B"/>
                 </a:solidFill>
                 <a:latin typeface="Arial"/>
               </a:rPr>
-              <a:t>  Accuracy          = 0.743</a:t>
-            </a:r>
-            <a:br/>
-            <a:r>
-              <a:rPr sz="1500" b="0">
-                <a:solidFill>
-                  <a:srgbClr val="1E293B"/>
-                </a:solidFill>
-                <a:latin typeface="Arial"/>
-              </a:rPr>
-              <a:t>  Balanced accuracy = 0.744</a:t>
-            </a:r>
-            <a:br/>
-            <a:r>
-              <a:rPr sz="1500" b="0">
-                <a:solidFill>
-                  <a:srgbClr val="1E293B"/>
-                </a:solidFill>
-                <a:latin typeface="Arial"/>
-              </a:rPr>
-              <a:t>  Macro F1          = 0.742</a:t>
+              <a:t>Why balanced accuracy: class frequencies are similar but not identical; balanced accuracy averages recall across classes and is less optimistic than raw accuracy on mildly imbalanced problems.</a:t>
             </a:r>
             <a:br/>
             <a:br/>
             <a:r>
-              <a:rPr sz="1500" b="0">
+              <a:rPr sz="1000" b="0">
                 <a:solidFill>
                   <a:srgbClr val="1E293B"/>
                 </a:solidFill>
                 <a:latin typeface="Arial"/>
               </a:rPr>
-              <a:t>Random baseline for 3 classes ≈ 33% accuracy — large margin confirms generalisation, not overfitting to COAD.</a:t>
+              <a:t>Full CV summary (mean across folds):</a:t>
+            </a:r>
+            <a:br/>
+            <a:r>
+              <a:rPr sz="1000" b="0">
+                <a:solidFill>
+                  <a:srgbClr val="1E293B"/>
+                </a:solidFill>
+                <a:latin typeface="Arial"/>
+              </a:rPr>
+              <a:t>Model          Bal.Acc.  Acc.    Macro-F1</a:t>
+            </a:r>
+            <a:br/>
+            <a:r>
+              <a:rPr sz="1000" b="0">
+                <a:solidFill>
+                  <a:srgbClr val="1E293B"/>
+                </a:solidFill>
+                <a:latin typeface="Arial"/>
+              </a:rPr>
+              <a:t>──────────────────────────────────────────</a:t>
+            </a:r>
+            <a:br/>
+            <a:r>
+              <a:rPr sz="1000" b="0">
+                <a:solidFill>
+                  <a:srgbClr val="1E293B"/>
+                </a:solidFill>
+                <a:latin typeface="Arial"/>
+              </a:rPr>
+              <a:t>RandomForest   0.785     0.786   0.786</a:t>
+            </a:r>
+            <a:br/>
+            <a:r>
+              <a:rPr sz="1000" b="0">
+                <a:solidFill>
+                  <a:srgbClr val="1E293B"/>
+                </a:solidFill>
+                <a:latin typeface="Arial"/>
+              </a:rPr>
+              <a:t>SVM-linear     0.785     0.786   0.784</a:t>
+            </a:r>
+            <a:br/>
+            <a:r>
+              <a:rPr sz="1000" b="0">
+                <a:solidFill>
+                  <a:srgbClr val="1E293B"/>
+                </a:solidFill>
+                <a:latin typeface="Arial"/>
+              </a:rPr>
+              <a:t>Logistic       0.752     0.752   0.748</a:t>
+            </a:r>
+            <a:br/>
+            <a:r>
+              <a:rPr sz="1000" b="0">
+                <a:solidFill>
+                  <a:srgbClr val="1E293B"/>
+                </a:solidFill>
+                <a:latin typeface="Arial"/>
+              </a:rPr>
+              <a:t>SVM-RBF        0.735     0.735   0.736</a:t>
+            </a:r>
+            <a:br/>
+            <a:r>
+              <a:rPr sz="1000" b="0">
+                <a:solidFill>
+                  <a:srgbClr val="1E293B"/>
+                </a:solidFill>
+                <a:latin typeface="Arial"/>
+              </a:rPr>
+              <a:t>XGBoost        0.704     0.704   0.699</a:t>
+            </a:r>
+            <a:br/>
+            <a:r>
+              <a:rPr sz="1000" b="0">
+                <a:solidFill>
+                  <a:srgbClr val="1E293B"/>
+                </a:solidFill>
+                <a:latin typeface="Arial"/>
+              </a:rPr>
+              <a:t>kNN-5          0.648     0.649   0.645</a:t>
             </a:r>
           </a:p>
         </p:txBody>
@@ -4587,8 +4746,8 @@
         </p:nvSpPr>
         <p:spPr>
           <a:xfrm>
-            <a:off x="502920" y="6510528"/>
-            <a:ext cx="11185855" cy="256032"/>
+            <a:off x="608076" y="6528816"/>
+            <a:ext cx="11126419" cy="292608"/>
           </a:xfrm>
           <a:prstGeom prst="rect">
             <a:avLst/>
@@ -4596,20 +4755,20 @@
           <a:noFill/>
         </p:spPr>
         <p:txBody>
-          <a:bodyPr wrap="none">
-            <a:spAutoFit/>
+          <a:bodyPr wrap="square" lIns="38100" rIns="38100" tIns="25400" bIns="25400">
+            <a:noAutofit/>
           </a:bodyPr>
           <a:lstStyle/>
           <a:p>
             <a:pPr algn="l"/>
             <a:r>
-              <a:rPr sz="1000" b="0">
+              <a:rPr sz="900" b="0">
                 <a:solidFill>
                   <a:srgbClr val="64748B"/>
                 </a:solidFill>
                 <a:latin typeface="Arial"/>
               </a:rPr>
-              <a:t>outputs/tables/external_validation_summary_TCGA-READ.csv</a:t>
+              <a:t>outputs/tables/cv_results_TCGA-COAD.csv</a:t>
             </a:r>
           </a:p>
         </p:txBody>
@@ -4641,7 +4800,7 @@
         <p:spPr>
           <a:xfrm>
             <a:off x="0" y="0"/>
-            <a:ext cx="82296" cy="6858000"/>
+            <a:ext cx="77724" cy="6858000"/>
           </a:xfrm>
           <a:prstGeom prst="rect">
             <a:avLst/>
@@ -4683,8 +4842,8 @@
         </p:nvSpPr>
         <p:spPr>
           <a:xfrm>
-            <a:off x="640080" y="411480"/>
-            <a:ext cx="11002975" cy="1005840"/>
+            <a:off x="608076" y="310896"/>
+            <a:ext cx="11126419" cy="804672"/>
           </a:xfrm>
           <a:prstGeom prst="rect">
             <a:avLst/>
@@ -4692,8 +4851,8 @@
           <a:noFill/>
         </p:spPr>
         <p:txBody>
-          <a:bodyPr wrap="square">
-            <a:spAutoFit/>
+          <a:bodyPr wrap="square" lIns="38100" rIns="38100" tIns="25400" bIns="25400">
+            <a:noAutofit/>
           </a:bodyPr>
           <a:lstStyle/>
           <a:p>
@@ -4705,30 +4864,72 @@
                 </a:solidFill>
                 <a:latin typeface="Arial"/>
               </a:rPr>
-              <a:t>Survival analysis (TCGA-COAD)</a:t>
+              <a:t>Error structure &amp; calibration (Random Forest)</a:t>
             </a:r>
           </a:p>
           <a:p>
             <a:pPr>
+              <a:lnSpc>
+                <a:spcPct val="108000"/>
+              </a:lnSpc>
               <a:spcBef>
-                <a:spcPts val="600"/>
+                <a:spcPts val="400"/>
               </a:spcBef>
             </a:pPr>
             <a:r>
-              <a:rPr sz="1300" b="0">
+              <a:rPr sz="1200" b="0">
                 <a:solidFill>
                   <a:srgbClr val="64748B"/>
                 </a:solidFill>
                 <a:latin typeface="Arial"/>
               </a:rPr>
-              <a:t>Log-rank (3 groups): p = 0.081  (stat = 5.02)</a:t>
+              <a:t>Same model family as external validation export</a:t>
+            </a:r>
+          </a:p>
+        </p:txBody>
+      </p:sp>
+      <p:sp>
+        <p:nvSpPr>
+          <p:cNvPr id="4" name="TextBox 3"/>
+          <p:cNvSpPr txBox="1"/>
+          <p:nvPr/>
+        </p:nvSpPr>
+        <p:spPr>
+          <a:xfrm>
+            <a:off x="608076" y="6144768"/>
+            <a:ext cx="11126419" cy="347472"/>
+          </a:xfrm>
+          <a:prstGeom prst="rect">
+            <a:avLst/>
+          </a:prstGeom>
+          <a:noFill/>
+        </p:spPr>
+        <p:txBody>
+          <a:bodyPr wrap="square" lIns="38100" rIns="38100" tIns="25400" bIns="25400">
+            <a:noAutofit/>
+          </a:bodyPr>
+          <a:lstStyle/>
+          <a:p>
+            <a:pPr algn="l">
+              <a:lnSpc>
+                <a:spcPct val="112000"/>
+              </a:lnSpc>
+            </a:pPr>
+            <a:r>
+              <a:rPr sz="1000" b="0">
+                <a:solidFill>
+                  <a:srgbClr val="64748B"/>
+                </a:solidFill>
+                <a:latin typeface="Arial"/>
+              </a:rPr>
+              <a:t>Left: cross-validated confusion matrix — most mass on the diagonal; off-diagonal mass often involves Intermediate vs Hot/Cold, consistent with intermediate biology. Right: one-vs-rest ROC curves per class; high AUC for Cold/Hot indicates separability; Intermediate is intrinsically harder.</a:t>
             </a:r>
           </a:p>
         </p:txBody>
       </p:sp>
       <p:pic>
         <p:nvPicPr>
-          <p:cNvPr id="4" name="Picture 3" descr="TCGA-COAD_kaplan_meier.png"/>
+          <p:cNvPr id="5" name="Picture 4" descr="TCGA-COAD_RandomForest_confmat.png"/>
           <p:cNvPicPr>
             <a:picLocks noChangeAspect="1"/>
           </p:cNvPicPr>
@@ -4742,24 +4943,48 @@
         </p:blipFill>
         <p:spPr>
           <a:xfrm>
-            <a:off x="594360" y="1097280"/>
-            <a:ext cx="5989320" cy="3638420"/>
+            <a:off x="608076" y="1078992"/>
+            <a:ext cx="5499201" cy="3354512"/>
           </a:xfrm>
           <a:prstGeom prst="rect">
             <a:avLst/>
           </a:prstGeom>
         </p:spPr>
       </p:pic>
-      <p:sp>
-        <p:nvSpPr>
-          <p:cNvPr id="5" name="TextBox 4"/>
+      <p:pic>
+        <p:nvPicPr>
+          <p:cNvPr id="6" name="Picture 5" descr="TCGA-COAD_RandomForest_roc.png"/>
+          <p:cNvPicPr>
+            <a:picLocks noChangeAspect="1"/>
+          </p:cNvPicPr>
+          <p:nvPr/>
+        </p:nvPicPr>
+        <p:blipFill>
+          <a:blip r:embed="rId3"/>
+          <a:stretch>
+            <a:fillRect/>
+          </a:stretch>
+        </p:blipFill>
+        <p:spPr>
+          <a:xfrm>
+            <a:off x="6217005" y="1078992"/>
+            <a:ext cx="5499201" cy="4140714"/>
+          </a:xfrm>
+          <a:prstGeom prst="rect">
+            <a:avLst/>
+          </a:prstGeom>
+        </p:spPr>
+      </p:pic>
+      <p:sp>
+        <p:nvSpPr>
+          <p:cNvPr id="7" name="TextBox 6"/>
           <p:cNvSpPr txBox="1"/>
           <p:nvPr/>
         </p:nvSpPr>
         <p:spPr>
           <a:xfrm>
-            <a:off x="6675120" y="1234440"/>
-            <a:ext cx="5486400" cy="5029200"/>
+            <a:off x="608076" y="6528816"/>
+            <a:ext cx="11126419" cy="292608"/>
           </a:xfrm>
           <a:prstGeom prst="rect">
             <a:avLst/>
@@ -4767,81 +4992,20 @@
           <a:noFill/>
         </p:spPr>
         <p:txBody>
-          <a:bodyPr wrap="none">
-            <a:spAutoFit/>
+          <a:bodyPr wrap="square" lIns="38100" rIns="38100" tIns="25400" bIns="25400">
+            <a:noAutofit/>
           </a:bodyPr>
           <a:lstStyle/>
           <a:p>
-            <a:pPr algn="l">
-              <a:lnSpc>
-                <a:spcPct val="115000"/>
-              </a:lnSpc>
-            </a:pPr>
-            <a:r>
-              <a:rPr sz="1400" b="0">
-                <a:solidFill>
-                  <a:srgbClr val="1E293B"/>
-                </a:solidFill>
-                <a:latin typeface="Arial"/>
-              </a:rPr>
-              <a:t>Kaplan–Meier stratified by ssGSEA immune label; shaded bands = confidence.</a:t>
-            </a:r>
-            <a:br/>
-            <a:br/>
-            <a:r>
-              <a:rPr sz="1400" b="0">
-                <a:solidFill>
-                  <a:srgbClr val="1E293B"/>
-                </a:solidFill>
-                <a:latin typeface="Arial"/>
-              </a:rPr>
-              <a:t>Multivariate log-rank p does not cross α = 0.05 — interpret as directional trend (Cold worse than Hot) with limited death events / censoring.</a:t>
-            </a:r>
-            <a:br/>
-            <a:br/>
-            <a:r>
-              <a:rPr sz="1400" b="0">
-                <a:solidFill>
-                  <a:srgbClr val="1E293B"/>
-                </a:solidFill>
-                <a:latin typeface="Arial"/>
-              </a:rPr>
-              <a:t>Cox model on ssGSEA cell scores + PLS of expression vs survival time in supplementary outputs.</a:t>
-            </a:r>
-          </a:p>
-        </p:txBody>
-      </p:sp>
-      <p:sp>
-        <p:nvSpPr>
-          <p:cNvPr id="6" name="TextBox 5"/>
-          <p:cNvSpPr txBox="1"/>
-          <p:nvPr/>
-        </p:nvSpPr>
-        <p:spPr>
-          <a:xfrm>
-            <a:off x="502920" y="6510528"/>
-            <a:ext cx="11185855" cy="256032"/>
-          </a:xfrm>
-          <a:prstGeom prst="rect">
-            <a:avLst/>
-          </a:prstGeom>
-          <a:noFill/>
-        </p:spPr>
-        <p:txBody>
-          <a:bodyPr wrap="none">
-            <a:spAutoFit/>
-          </a:bodyPr>
-          <a:lstStyle/>
-          <a:p>
             <a:pPr algn="l"/>
             <a:r>
-              <a:rPr sz="1000" b="0">
+              <a:rPr sz="900" b="0">
                 <a:solidFill>
                   <a:srgbClr val="64748B"/>
                 </a:solidFill>
                 <a:latin typeface="Arial"/>
               </a:rPr>
-              <a:t>outputs/tables/logrank_TCGA-COAD.csv · figures in outputs/figures/survival/</a:t>
+              <a:t>outputs/figures/classification/TCGA-COAD_RandomForest_*.png</a:t>
             </a:r>
           </a:p>
         </p:txBody>
@@ -4873,7 +5037,7 @@
         <p:spPr>
           <a:xfrm>
             <a:off x="0" y="0"/>
-            <a:ext cx="82296" cy="6858000"/>
+            <a:ext cx="77724" cy="6858000"/>
           </a:xfrm>
           <a:prstGeom prst="rect">
             <a:avLst/>
@@ -4915,8 +5079,8 @@
         </p:nvSpPr>
         <p:spPr>
           <a:xfrm>
-            <a:off x="640080" y="411480"/>
-            <a:ext cx="11002975" cy="1005840"/>
+            <a:off x="608076" y="310896"/>
+            <a:ext cx="11126419" cy="804672"/>
           </a:xfrm>
           <a:prstGeom prst="rect">
             <a:avLst/>
@@ -4924,196 +5088,67 @@
           <a:noFill/>
         </p:spPr>
         <p:txBody>
-          <a:bodyPr wrap="square">
-            <a:spAutoFit/>
+          <a:bodyPr wrap="square" lIns="38100" rIns="38100" tIns="25400" bIns="25400">
+            <a:noAutofit/>
           </a:bodyPr>
           <a:lstStyle/>
           <a:p>
             <a:pPr algn="l"/>
             <a:r>
-              <a:rPr sz="2800" b="1">
+              <a:rPr sz="3000" b="1">
                 <a:solidFill>
                   <a:srgbClr val="1E293B"/>
                 </a:solidFill>
                 <a:latin typeface="Arial"/>
               </a:rPr>
-              <a:t>Conclusions</a:t>
+              <a:t>Independent cohort validation</a:t>
             </a:r>
           </a:p>
           <a:p>
             <a:pPr>
+              <a:lnSpc>
+                <a:spcPct val="108000"/>
+              </a:lnSpc>
               <a:spcBef>
-                <a:spcPts val="600"/>
+                <a:spcPts val="400"/>
               </a:spcBef>
             </a:pPr>
             <a:r>
-              <a:rPr sz="1300" b="0">
+              <a:rPr sz="1200" b="0">
                 <a:solidFill>
                   <a:srgbClr val="64748B"/>
                 </a:solidFill>
                 <a:latin typeface="Arial"/>
               </a:rPr>
-              <a:t>What we can claim with confidence</a:t>
-            </a:r>
-          </a:p>
-        </p:txBody>
-      </p:sp>
-      <p:sp>
-        <p:nvSpPr>
-          <p:cNvPr id="4" name="TextBox 3"/>
-          <p:cNvSpPr txBox="1"/>
-          <p:nvPr/>
-        </p:nvSpPr>
-        <p:spPr>
-          <a:xfrm>
-            <a:off x="667512" y="1143000"/>
-            <a:ext cx="11076127" cy="5394960"/>
-          </a:xfrm>
-          <a:prstGeom prst="rect">
-            <a:avLst/>
-          </a:prstGeom>
-          <a:noFill/>
-        </p:spPr>
-        <p:txBody>
-          <a:bodyPr wrap="none">
-            <a:spAutoFit/>
-          </a:bodyPr>
-          <a:lstStyle/>
-          <a:p>
-            <a:pPr>
-              <a:lnSpc>
-                <a:spcPct val="114000"/>
-              </a:lnSpc>
-              <a:spcAft>
-                <a:spcPts val="700"/>
-              </a:spcAft>
-            </a:pPr>
-            <a:r>
-              <a:rPr sz="1400" b="0">
-                <a:solidFill>
-                  <a:srgbClr val="1E293B"/>
-                </a:solidFill>
-                <a:latin typeface="Arial"/>
-              </a:rPr>
-              <a:t>▸ Strong transcriptomic separation: 2,269 high-confidence DE genes; 8,198 genes significant by Welch t after BH.</a:t>
-            </a:r>
-          </a:p>
-          <a:p>
-            <a:pPr>
-              <a:lnSpc>
-                <a:spcPct val="114000"/>
-              </a:lnSpc>
-              <a:spcAft>
-                <a:spcPts val="700"/>
-              </a:spcAft>
-            </a:pPr>
-            <a:r>
-              <a:rPr sz="1400" b="0">
-                <a:solidFill>
-                  <a:srgbClr val="1E293B"/>
-                </a:solidFill>
-                <a:latin typeface="Arial"/>
-              </a:rPr>
-              <a:t>▸ Unsupervised views (PCA/UMAP) and clustering partially align with immune tertiles (e.g. k-means ARI 0.114).</a:t>
-            </a:r>
-          </a:p>
-          <a:p>
-            <a:pPr>
-              <a:lnSpc>
-                <a:spcPct val="114000"/>
-              </a:lnSpc>
-              <a:spcAft>
-                <a:spcPts val="700"/>
-              </a:spcAft>
-            </a:pPr>
-            <a:r>
-              <a:rPr sz="1400" b="0">
-                <a:solidFill>
-                  <a:srgbClr val="1E293B"/>
-                </a:solidFill>
-                <a:latin typeface="Arial"/>
-              </a:rPr>
-              <a:t>▸ Six classifiers; best CV balanced accuracy 0.785 on COAD (RandomForest).</a:t>
-            </a:r>
-          </a:p>
-          <a:p>
-            <a:pPr>
-              <a:lnSpc>
-                <a:spcPct val="114000"/>
-              </a:lnSpc>
-              <a:spcAft>
-                <a:spcPts val="700"/>
-              </a:spcAft>
-            </a:pPr>
-            <a:r>
-              <a:rPr sz="1400" b="0">
-                <a:solidFill>
-                  <a:srgbClr val="1E293B"/>
-                </a:solidFill>
-                <a:latin typeface="Arial"/>
-              </a:rPr>
-              <a:t>▸ External READ test: balanced accuracy 0.744 — robust generalisation to new patients.</a:t>
-            </a:r>
-          </a:p>
-          <a:p>
-            <a:pPr>
-              <a:lnSpc>
-                <a:spcPct val="114000"/>
-              </a:lnSpc>
-              <a:spcAft>
-                <a:spcPts val="700"/>
-              </a:spcAft>
-            </a:pPr>
-            <a:r>
-              <a:rPr sz="1400" b="0">
-                <a:solidFill>
-                  <a:srgbClr val="1E293B"/>
-                </a:solidFill>
-                <a:latin typeface="Arial"/>
-              </a:rPr>
-              <a:t>▸ Survival: trend consistent with literature; log-rank p = 0.081 (not significant at 0.05).</a:t>
-            </a:r>
-          </a:p>
-          <a:p>
-            <a:pPr>
-              <a:lnSpc>
-                <a:spcPct val="114000"/>
-              </a:lnSpc>
-              <a:spcAft>
-                <a:spcPts val="700"/>
-              </a:spcAft>
-            </a:pPr>
-            <a:r>
-              <a:rPr sz="1400" b="0">
-                <a:solidFill>
-                  <a:srgbClr val="1E293B"/>
-                </a:solidFill>
-                <a:latin typeface="Arial"/>
-              </a:rPr>
-              <a:t>▸ Limitations: ssGSEA labels ≠ pathology; READ is same RNA-seq platform as COAD; GEO cohorts not used in final scope.</a:t>
-            </a:r>
-          </a:p>
-          <a:p>
-            <a:pPr>
-              <a:lnSpc>
-                <a:spcPct val="114000"/>
-              </a:lnSpc>
-              <a:spcAft>
-                <a:spcPts val="700"/>
-              </a:spcAft>
-            </a:pPr>
-            <a:r>
-              <a:rPr sz="1400" b="0">
-                <a:solidFill>
-                  <a:srgbClr val="1E293B"/>
-                </a:solidFill>
-                <a:latin typeface="Arial"/>
-              </a:rPr>
-              <a:t>▸ Future: orthogonal validation (IHC or scRNA-seq), pathway-level Fisher/GSEA extensions, clinical covariate modelling.</a:t>
-            </a:r>
-          </a:p>
-        </p:txBody>
-      </p:sp>
+              <a:t>Train on all COAD · evaluate on READ (n = 109) · model = RandomForest</a:t>
+            </a:r>
+          </a:p>
+        </p:txBody>
+      </p:sp>
+      <p:pic>
+        <p:nvPicPr>
+          <p:cNvPr id="4" name="Picture 3" descr="validation_confmat_TCGA-READ.png"/>
+          <p:cNvPicPr>
+            <a:picLocks noChangeAspect="1"/>
+          </p:cNvPicPr>
+          <p:nvPr/>
+        </p:nvPicPr>
+        <p:blipFill>
+          <a:blip r:embed="rId2"/>
+          <a:stretch>
+            <a:fillRect/>
+          </a:stretch>
+        </p:blipFill>
+        <p:spPr>
+          <a:xfrm>
+            <a:off x="608076" y="1188720"/>
+            <a:ext cx="5253813" cy="3913627"/>
+          </a:xfrm>
+          <a:prstGeom prst="rect">
+            <a:avLst/>
+          </a:prstGeom>
+        </p:spPr>
+      </p:pic>
       <p:sp>
         <p:nvSpPr>
           <p:cNvPr id="5" name="TextBox 4"/>
@@ -5122,8 +5157,8 @@
         </p:nvSpPr>
         <p:spPr>
           <a:xfrm>
-            <a:off x="502920" y="6510528"/>
-            <a:ext cx="11185855" cy="256032"/>
+            <a:off x="5999049" y="1078992"/>
+            <a:ext cx="5735445" cy="5404104"/>
           </a:xfrm>
           <a:prstGeom prst="rect">
             <a:avLst/>
@@ -5131,20 +5166,111 @@
           <a:noFill/>
         </p:spPr>
         <p:txBody>
-          <a:bodyPr wrap="none">
-            <a:spAutoFit/>
+          <a:bodyPr wrap="square" lIns="38100" rIns="38100" tIns="25400" bIns="25400">
+            <a:noAutofit/>
           </a:bodyPr>
           <a:lstStyle/>
           <a:p>
+            <a:pPr algn="l">
+              <a:lnSpc>
+                <a:spcPct val="112000"/>
+              </a:lnSpc>
+            </a:pPr>
+            <a:r>
+              <a:rPr sz="1100" b="0">
+                <a:solidFill>
+                  <a:srgbClr val="1E293B"/>
+                </a:solidFill>
+                <a:latin typeface="Arial"/>
+              </a:rPr>
+              <a:t>READ patients were never used during model selection or cross-validation; only COAD folds informed the choice of Random Forest. READ expression was subset to the training gene list; any gene absent in READ was imputed as zero expression after alignment.</a:t>
+            </a:r>
+            <a:br/>
+            <a:br/>
+            <a:r>
+              <a:rPr sz="1100" b="0">
+                <a:solidFill>
+                  <a:srgbClr val="1E293B"/>
+                </a:solidFill>
+                <a:latin typeface="Arial"/>
+              </a:rPr>
+              <a:t>Held-out metrics:</a:t>
+            </a:r>
+            <a:br/>
+            <a:r>
+              <a:rPr sz="1100" b="0">
+                <a:solidFill>
+                  <a:srgbClr val="1E293B"/>
+                </a:solidFill>
+                <a:latin typeface="Arial"/>
+              </a:rPr>
+              <a:t>  • Accuracy           0.743</a:t>
+            </a:r>
+            <a:br/>
+            <a:r>
+              <a:rPr sz="1100" b="0">
+                <a:solidFill>
+                  <a:srgbClr val="1E293B"/>
+                </a:solidFill>
+                <a:latin typeface="Arial"/>
+              </a:rPr>
+              <a:t>  • Balanced accuracy  0.744</a:t>
+            </a:r>
+            <a:br/>
+            <a:r>
+              <a:rPr sz="1100" b="0">
+                <a:solidFill>
+                  <a:srgbClr val="1E293B"/>
+                </a:solidFill>
+                <a:latin typeface="Arial"/>
+              </a:rPr>
+              <a:t>  • Macro F1           0.742</a:t>
+            </a:r>
+            <a:br/>
+            <a:br/>
+            <a:r>
+              <a:rPr sz="1100" b="0">
+                <a:solidFill>
+                  <a:srgbClr val="1E293B"/>
+                </a:solidFill>
+                <a:latin typeface="Arial"/>
+              </a:rPr>
+              <a:t>Compared to ~33% expected accuracy for random guessing among three classes, the ~0.74 balanced accuracy indicates genuine transfer of signal across cohorts processed under the same GDC pipeline — different patients and tissue sites (colon vs rectum) but comparable assay technology.</a:t>
+            </a:r>
+          </a:p>
+        </p:txBody>
+      </p:sp>
+      <p:sp>
+        <p:nvSpPr>
+          <p:cNvPr id="6" name="TextBox 5"/>
+          <p:cNvSpPr txBox="1"/>
+          <p:nvPr/>
+        </p:nvSpPr>
+        <p:spPr>
+          <a:xfrm>
+            <a:off x="608076" y="6528816"/>
+            <a:ext cx="11126419" cy="292608"/>
+          </a:xfrm>
+          <a:prstGeom prst="rect">
+            <a:avLst/>
+          </a:prstGeom>
+          <a:noFill/>
+        </p:spPr>
+        <p:txBody>
+          <a:bodyPr wrap="square" lIns="38100" rIns="38100" tIns="25400" bIns="25400">
+            <a:noAutofit/>
+          </a:bodyPr>
+          <a:lstStyle/>
+          <a:p>
             <a:pPr algn="l"/>
             <a:r>
-              <a:rPr sz="1000" b="0">
+              <a:rPr sz="900" b="0">
                 <a:solidFill>
                   <a:srgbClr val="64748B"/>
                 </a:solidFill>
                 <a:latin typeface="Arial"/>
               </a:rPr>
-              <a:t>https://github.com/Aryan7865/cold-hot-tumour-classification</a:t>
+              <a:t>outputs/tables/external_validation_summary_TCGA-READ.csv</a:t>
             </a:r>
           </a:p>
         </p:txBody>
@@ -5176,13 +5302,13 @@
         <p:spPr>
           <a:xfrm>
             <a:off x="0" y="0"/>
-            <a:ext cx="12191695" cy="6858000"/>
+            <a:ext cx="77724" cy="6858000"/>
           </a:xfrm>
           <a:prstGeom prst="rect">
             <a:avLst/>
           </a:prstGeom>
           <a:solidFill>
-            <a:srgbClr val="0F172A"/>
+            <a:srgbClr val="06B6D4"/>
           </a:solidFill>
           <a:ln>
             <a:noFill/>
@@ -5218,8 +5344,8 @@
         </p:nvSpPr>
         <p:spPr>
           <a:xfrm>
-            <a:off x="502920" y="2651760"/>
-            <a:ext cx="11185855" cy="1280160"/>
+            <a:off x="608076" y="310896"/>
+            <a:ext cx="11126419" cy="804672"/>
           </a:xfrm>
           <a:prstGeom prst="rect">
             <a:avLst/>
@@ -5227,66 +5353,191 @@
           <a:noFill/>
         </p:spPr>
         <p:txBody>
-          <a:bodyPr wrap="none">
-            <a:spAutoFit/>
+          <a:bodyPr wrap="square" lIns="38100" rIns="38100" tIns="25400" bIns="25400">
+            <a:noAutofit/>
           </a:bodyPr>
           <a:lstStyle/>
           <a:p>
-            <a:pPr algn="ctr"/>
-            <a:r>
-              <a:rPr sz="4400" b="1">
-                <a:solidFill>
-                  <a:srgbClr val="FFFFFF"/>
-                </a:solidFill>
-                <a:latin typeface="Arial"/>
-              </a:rPr>
-              <a:t>Thank you</a:t>
-            </a:r>
-          </a:p>
-          <a:p>
-            <a:pPr algn="ctr">
+            <a:pPr algn="l"/>
+            <a:r>
+              <a:rPr sz="3000" b="1">
+                <a:solidFill>
+                  <a:srgbClr val="1E293B"/>
+                </a:solidFill>
+                <a:latin typeface="Arial"/>
+              </a:rPr>
+              <a:t>Survival by immune tertile (COAD)</a:t>
+            </a:r>
+          </a:p>
+          <a:p>
+            <a:pPr>
+              <a:lnSpc>
+                <a:spcPct val="108000"/>
+              </a:lnSpc>
               <a:spcBef>
-                <a:spcPts val="1800"/>
+                <a:spcPts val="400"/>
               </a:spcBef>
             </a:pPr>
             <a:r>
-              <a:rPr sz="2200" b="0">
-                <a:solidFill>
-                  <a:srgbClr val="06B6D4"/>
-                </a:solidFill>
-                <a:latin typeface="Arial"/>
-              </a:rPr>
-              <a:t>Questions?</a:t>
-            </a:r>
-          </a:p>
-          <a:p>
-            <a:pPr algn="ctr">
-              <a:spcBef>
-                <a:spcPts val="3600"/>
-              </a:spcBef>
+              <a:rPr sz="1200" b="0">
+                <a:solidFill>
+                  <a:srgbClr val="64748B"/>
+                </a:solidFill>
+                <a:latin typeface="Arial"/>
+              </a:rPr>
+              <a:t>Multivariate log-rank p = 0.081 (χ² statistic = 5.02)</a:t>
+            </a:r>
+          </a:p>
+        </p:txBody>
+      </p:sp>
+      <p:pic>
+        <p:nvPicPr>
+          <p:cNvPr id="4" name="Picture 3" descr="TCGA-COAD_kaplan_meier.png"/>
+          <p:cNvPicPr>
+            <a:picLocks noChangeAspect="1"/>
+          </p:cNvPicPr>
+          <p:nvPr/>
+        </p:nvPicPr>
+        <p:blipFill>
+          <a:blip r:embed="rId2"/>
+          <a:stretch>
+            <a:fillRect/>
+          </a:stretch>
+        </p:blipFill>
+        <p:spPr>
+          <a:xfrm>
+            <a:off x="608076" y="1078992"/>
+            <a:ext cx="5698869" cy="3461976"/>
+          </a:xfrm>
+          <a:prstGeom prst="rect">
+            <a:avLst/>
+          </a:prstGeom>
+        </p:spPr>
+      </p:pic>
+      <p:sp>
+        <p:nvSpPr>
+          <p:cNvPr id="5" name="TextBox 4"/>
+          <p:cNvSpPr txBox="1"/>
+          <p:nvPr/>
+        </p:nvSpPr>
+        <p:spPr>
+          <a:xfrm>
+            <a:off x="6444105" y="1078992"/>
+            <a:ext cx="5290389" cy="5404104"/>
+          </a:xfrm>
+          <a:prstGeom prst="rect">
+            <a:avLst/>
+          </a:prstGeom>
+          <a:noFill/>
+        </p:spPr>
+        <p:txBody>
+          <a:bodyPr wrap="square" lIns="38100" rIns="38100" tIns="25400" bIns="25400">
+            <a:noAutofit/>
+          </a:bodyPr>
+          <a:lstStyle/>
+          <a:p>
+            <a:pPr algn="l">
+              <a:lnSpc>
+                <a:spcPct val="112000"/>
+              </a:lnSpc>
             </a:pPr>
             <a:r>
-              <a:rPr sz="1200" b="0">
-                <a:solidFill>
-                  <a:srgbClr val="94A3B8"/>
-                </a:solidFill>
-                <a:latin typeface="Arial"/>
-              </a:rPr>
-              <a:t>https://github.com/Aryan7865/cold-hot-tumour-classification</a:t>
-            </a:r>
-          </a:p>
-        </p:txBody>
-      </p:sp>
-      <p:sp>
-        <p:nvSpPr>
-          <p:cNvPr id="4" name="Rectangle 3"/>
+              <a:rPr sz="1100" b="0">
+                <a:solidFill>
+                  <a:srgbClr val="1E293B"/>
+                </a:solidFill>
+                <a:latin typeface="Arial"/>
+              </a:rPr>
+              <a:t>Kaplan–Meier step functions with shaded 95% confidence bands. Visual separation between Cold vs Hot curves is modest at early times and overlaps at long follow-up because of censoring and competing risks.</a:t>
+            </a:r>
+            <a:br/>
+            <a:br/>
+            <a:r>
+              <a:rPr sz="1100" b="0">
+                <a:solidFill>
+                  <a:srgbClr val="1E293B"/>
+                </a:solidFill>
+                <a:latin typeface="Arial"/>
+              </a:rPr>
+              <a:t>Formal log-rank test across all three labels: p = 0.081 — not significant at α = 0.05. We therefore describe survival differences as hypothesis-generating rather than definitive proof in this cohort.</a:t>
+            </a:r>
+            <a:br/>
+            <a:br/>
+            <a:r>
+              <a:rPr sz="1100" b="0">
+                <a:solidFill>
+                  <a:srgbClr val="1E293B"/>
+                </a:solidFill>
+                <a:latin typeface="Arial"/>
+              </a:rPr>
+              <a:t>We additionally fit penalised Cox regression on ssGSEA cell-type scores and PLS regression from high-dimensional expression to survival time (see outputs/tables/cox_TCGA-COAD.csv and pls_TCGA-COAD.csv plus survival figures).</a:t>
+            </a:r>
+          </a:p>
+        </p:txBody>
+      </p:sp>
+      <p:sp>
+        <p:nvSpPr>
+          <p:cNvPr id="6" name="TextBox 5"/>
+          <p:cNvSpPr txBox="1"/>
+          <p:nvPr/>
+        </p:nvSpPr>
+        <p:spPr>
+          <a:xfrm>
+            <a:off x="608076" y="6528816"/>
+            <a:ext cx="11126419" cy="292608"/>
+          </a:xfrm>
+          <a:prstGeom prst="rect">
+            <a:avLst/>
+          </a:prstGeom>
+          <a:noFill/>
+        </p:spPr>
+        <p:txBody>
+          <a:bodyPr wrap="square" lIns="38100" rIns="38100" tIns="25400" bIns="25400">
+            <a:noAutofit/>
+          </a:bodyPr>
+          <a:lstStyle/>
+          <a:p>
+            <a:pPr algn="l"/>
+            <a:r>
+              <a:rPr sz="900" b="0">
+                <a:solidFill>
+                  <a:srgbClr val="64748B"/>
+                </a:solidFill>
+                <a:latin typeface="Arial"/>
+              </a:rPr>
+              <a:t>outputs/tables/logrank_TCGA-COAD.csv</a:t>
+            </a:r>
+          </a:p>
+        </p:txBody>
+      </p:sp>
+    </p:spTree>
+  </p:cSld>
+  <p:clrMapOvr>
+    <a:masterClrMapping/>
+  </p:clrMapOvr>
+</p:sld>
+</file>
+
+<file path=ppt/slides/slide19.xml><?xml version="1.0" encoding="utf-8"?>
+<p:sld xmlns:a="http://schemas.openxmlformats.org/drawingml/2006/main" xmlns:p="http://schemas.openxmlformats.org/presentationml/2006/main" xmlns:r="http://schemas.openxmlformats.org/officeDocument/2006/relationships">
+  <p:cSld>
+    <p:spTree>
+      <p:nvGrpSpPr>
+        <p:cNvPr id="1" name=""/>
+        <p:cNvGrpSpPr/>
+        <p:nvPr/>
+      </p:nvGrpSpPr>
+      <p:grpSpPr/>
+      <p:sp>
+        <p:nvSpPr>
+          <p:cNvPr id="2" name="Rectangle 1"/>
           <p:cNvSpPr/>
           <p:nvPr/>
         </p:nvSpPr>
         <p:spPr>
           <a:xfrm>
-            <a:off x="6013551" y="2011680"/>
-            <a:ext cx="164592" cy="2834640"/>
+            <a:off x="0" y="0"/>
+            <a:ext cx="77724" cy="6858000"/>
           </a:xfrm>
           <a:prstGeom prst="rect">
             <a:avLst/>
@@ -5317,6 +5568,156 @@
           <a:lstStyle/>
           <a:p>
             <a:pPr algn="ctr"/>
+          </a:p>
+        </p:txBody>
+      </p:sp>
+      <p:sp>
+        <p:nvSpPr>
+          <p:cNvPr id="3" name="TextBox 2"/>
+          <p:cNvSpPr txBox="1"/>
+          <p:nvPr/>
+        </p:nvSpPr>
+        <p:spPr>
+          <a:xfrm>
+            <a:off x="608076" y="310896"/>
+            <a:ext cx="11126419" cy="804672"/>
+          </a:xfrm>
+          <a:prstGeom prst="rect">
+            <a:avLst/>
+          </a:prstGeom>
+          <a:noFill/>
+        </p:spPr>
+        <p:txBody>
+          <a:bodyPr wrap="square" lIns="38100" rIns="38100" tIns="25400" bIns="25400">
+            <a:noAutofit/>
+          </a:bodyPr>
+          <a:lstStyle/>
+          <a:p>
+            <a:pPr algn="l"/>
+            <a:r>
+              <a:rPr sz="3000" b="1">
+                <a:solidFill>
+                  <a:srgbClr val="1E293B"/>
+                </a:solidFill>
+                <a:latin typeface="Arial"/>
+              </a:rPr>
+              <a:t>Discussion, limitations, future work</a:t>
+            </a:r>
+          </a:p>
+          <a:p>
+            <a:pPr>
+              <a:lnSpc>
+                <a:spcPct val="108000"/>
+              </a:lnSpc>
+              <a:spcBef>
+                <a:spcPts val="400"/>
+              </a:spcBef>
+            </a:pPr>
+            <a:r>
+              <a:rPr sz="1200" b="0">
+                <a:solidFill>
+                  <a:srgbClr val="64748B"/>
+                </a:solidFill>
+                <a:latin typeface="Arial"/>
+              </a:rPr>
+              <a:t>Critical appraisal — expected in written report</a:t>
+            </a:r>
+          </a:p>
+        </p:txBody>
+      </p:sp>
+      <p:sp>
+        <p:nvSpPr>
+          <p:cNvPr id="4" name="TextBox 3"/>
+          <p:cNvSpPr txBox="1"/>
+          <p:nvPr/>
+        </p:nvSpPr>
+        <p:spPr>
+          <a:xfrm>
+            <a:off x="608076" y="1078992"/>
+            <a:ext cx="11126419" cy="5404104"/>
+          </a:xfrm>
+          <a:prstGeom prst="rect">
+            <a:avLst/>
+          </a:prstGeom>
+          <a:noFill/>
+        </p:spPr>
+        <p:txBody>
+          <a:bodyPr wrap="square" lIns="38100" rIns="38100" tIns="25400" bIns="25400">
+            <a:noAutofit/>
+          </a:bodyPr>
+          <a:lstStyle/>
+          <a:p>
+            <a:pPr algn="l">
+              <a:lnSpc>
+                <a:spcPct val="112000"/>
+              </a:lnSpc>
+            </a:pPr>
+            <a:r>
+              <a:rPr sz="1000" b="0">
+                <a:solidFill>
+                  <a:srgbClr val="1E293B"/>
+                </a:solidFill>
+                <a:latin typeface="Arial"/>
+              </a:rPr>
+              <a:t>Strengths: (1) large public RNA-seq cohorts with harmonised preprocessing; (2) many complementary tests (parametric + non-parametric + two FDR strategies); (3) transparent immune labelling code; (4) six classifiers with nested feature selection; (5) true external generalisation check on READ; (6) biologically interpretable DE direction.</a:t>
+            </a:r>
+            <a:br/>
+            <a:br/>
+            <a:r>
+              <a:rPr sz="1000" b="0">
+                <a:solidFill>
+                  <a:srgbClr val="1E293B"/>
+                </a:solidFill>
+                <a:latin typeface="Arial"/>
+              </a:rPr>
+              <a:t>Limitations: (1) ssGSEA tertiles are a computational proxy, not gold-standard pathology; (2) COAD and READ share sequencing platform — we do not demonstrate cross-platform robustness to microarray here; (3) survival is under-powered for strong significance; (4) clinical covariates (stage, MSI) could be added as covariates or stratification in future work; (5) XGBoost underperformed linear models here — likely because ANOVA pre-screening already removes most non-linear signal from the feature matrix.</a:t>
+            </a:r>
+            <a:br/>
+            <a:br/>
+            <a:r>
+              <a:rPr sz="1000" b="0">
+                <a:solidFill>
+                  <a:srgbClr val="1E293B"/>
+                </a:solidFill>
+                <a:latin typeface="Arial"/>
+              </a:rPr>
+              <a:t>Future directions: integrate MSI status and stage into multivariate models; validate on GEO or single-cell  atlases; calibrate predicted probabilities for clinical decision support; explore pathway-level Fisher tests explicitly as in the course slide deck.</a:t>
+            </a:r>
+          </a:p>
+        </p:txBody>
+      </p:sp>
+      <p:sp>
+        <p:nvSpPr>
+          <p:cNvPr id="5" name="TextBox 4"/>
+          <p:cNvSpPr txBox="1"/>
+          <p:nvPr/>
+        </p:nvSpPr>
+        <p:spPr>
+          <a:xfrm>
+            <a:off x="608076" y="6528816"/>
+            <a:ext cx="11126419" cy="292608"/>
+          </a:xfrm>
+          <a:prstGeom prst="rect">
+            <a:avLst/>
+          </a:prstGeom>
+          <a:noFill/>
+        </p:spPr>
+        <p:txBody>
+          <a:bodyPr wrap="square" lIns="38100" rIns="38100" tIns="25400" bIns="25400">
+            <a:noAutofit/>
+          </a:bodyPr>
+          <a:lstStyle/>
+          <a:p>
+            <a:pPr algn="l"/>
+            <a:r>
+              <a:rPr sz="900" b="0">
+                <a:solidFill>
+                  <a:srgbClr val="64748B"/>
+                </a:solidFill>
+                <a:latin typeface="Arial"/>
+              </a:rPr>
+              <a:t>Written report: ≤8 pages Arial 12 (per instructor); this PPTX is complementary visual aid</a:t>
+            </a:r>
           </a:p>
         </p:txBody>
       </p:sp>
@@ -5347,7 +5748,7 @@
         <p:spPr>
           <a:xfrm>
             <a:off x="0" y="0"/>
-            <a:ext cx="82296" cy="6858000"/>
+            <a:ext cx="77724" cy="6858000"/>
           </a:xfrm>
           <a:prstGeom prst="rect">
             <a:avLst/>
@@ -5389,8 +5790,8 @@
         </p:nvSpPr>
         <p:spPr>
           <a:xfrm>
-            <a:off x="640080" y="411480"/>
-            <a:ext cx="11002975" cy="1005840"/>
+            <a:off x="608076" y="310896"/>
+            <a:ext cx="11126419" cy="804672"/>
           </a:xfrm>
           <a:prstGeom prst="rect">
             <a:avLst/>
@@ -5398,36 +5799,39 @@
           <a:noFill/>
         </p:spPr>
         <p:txBody>
-          <a:bodyPr wrap="square">
-            <a:spAutoFit/>
+          <a:bodyPr wrap="square" lIns="38100" rIns="38100" tIns="25400" bIns="25400">
+            <a:noAutofit/>
           </a:bodyPr>
           <a:lstStyle/>
           <a:p>
             <a:pPr algn="l"/>
             <a:r>
-              <a:rPr sz="2800" b="1">
+              <a:rPr sz="3000" b="1">
                 <a:solidFill>
                   <a:srgbClr val="1E293B"/>
                 </a:solidFill>
                 <a:latin typeface="Arial"/>
               </a:rPr>
-              <a:t>Why this problem matters</a:t>
+              <a:t>Clinical and scientific motivation</a:t>
             </a:r>
           </a:p>
           <a:p>
             <a:pPr>
+              <a:lnSpc>
+                <a:spcPct val="108000"/>
+              </a:lnSpc>
               <a:spcBef>
-                <a:spcPts val="600"/>
+                <a:spcPts val="400"/>
               </a:spcBef>
             </a:pPr>
             <a:r>
-              <a:rPr sz="1300" b="0">
+              <a:rPr sz="1200" b="0">
                 <a:solidFill>
                   <a:srgbClr val="64748B"/>
                 </a:solidFill>
                 <a:latin typeface="Arial"/>
               </a:rPr>
-              <a:t>Clinical + computational angle</a:t>
+              <a:t>Why bulk RNA-seq for immune phenotype?</a:t>
             </a:r>
           </a:p>
         </p:txBody>
@@ -5440,8 +5844,8 @@
         </p:nvSpPr>
         <p:spPr>
           <a:xfrm>
-            <a:off x="685800" y="1234440"/>
-            <a:ext cx="11048695" cy="5120640"/>
+            <a:off x="608076" y="1078992"/>
+            <a:ext cx="11126419" cy="5404104"/>
           </a:xfrm>
           <a:prstGeom prst="rect">
             <a:avLst/>
@@ -5449,35 +5853,46 @@
           <a:noFill/>
         </p:spPr>
         <p:txBody>
-          <a:bodyPr wrap="none">
-            <a:spAutoFit/>
+          <a:bodyPr wrap="square" lIns="38100" rIns="38100" tIns="25400" bIns="25400">
+            <a:noAutofit/>
           </a:bodyPr>
           <a:lstStyle/>
           <a:p>
             <a:pPr algn="l">
               <a:lnSpc>
-                <a:spcPct val="115000"/>
+                <a:spcPct val="112000"/>
               </a:lnSpc>
             </a:pPr>
             <a:r>
-              <a:rPr sz="1500" b="0">
+              <a:rPr sz="1300" b="0">
                 <a:solidFill>
                   <a:srgbClr val="1E293B"/>
                 </a:solidFill>
                 <a:latin typeface="Arial"/>
               </a:rPr>
-              <a:t>Immune checkpoint therapy helps some colorectal cancer patients enormously — but only when the tumour microenvironment is already “hot” (lymphocyte-rich). Cold, immune-excluded tumours rarely respond.</a:t>
+              <a:t>Immune checkpoint inhibitors (e.g. anti–PD-1) can produce durable responses in a subset of microsatellite-instable colorectal cancers, but most metastatic CRC remains checkpoint-refractory. Clinical benefit correlates with an inflamed, T-cell–rich (“hot”) microenvironment versus an immune-excluded or deserted (“cold”) state.</a:t>
             </a:r>
             <a:br/>
             <a:br/>
             <a:r>
-              <a:rPr sz="1500" b="0">
+              <a:rPr sz="1300" b="0">
                 <a:solidFill>
                   <a:srgbClr val="1E293B"/>
                 </a:solidFill>
                 <a:latin typeface="Arial"/>
               </a:rPr>
-              <a:t>Hospitals increasingly have bulk RNA-seq from tumour samples. If we can infer hot vs cold vs intermediate phenotypes from expression alone, we connect routine omics data to immunotherapy stratification — exactly the kind of large-scale omics question BT3041 targets.</a:t>
+              <a:t>Multiplex immunohistochemistry is informative but not universally available. Bulk RNA-seq is increasingly standard in research and translational settings: it measures thousands of transcripts per tumour simultaneously, enabling both exploratory visualisation and formal inference.</a:t>
+            </a:r>
+            <a:br/>
+            <a:br/>
+            <a:r>
+              <a:rPr sz="1300" b="0">
+                <a:solidFill>
+                  <a:srgbClr val="1E293B"/>
+                </a:solidFill>
+                <a:latin typeface="Arial"/>
+              </a:rPr>
+              <a:t>Our project asks whether computational immune scores and downstream statistics/ML can recover hot–cold–intermediate structure from expression alone, and whether a classifier trained in one TCGA cohort predicts labels in a second, independent cohort — satisfying BT3041’s emphasis on large-scale omics, hypothesis testing, and validation.</a:t>
             </a:r>
           </a:p>
         </p:txBody>
@@ -5490,8 +5905,8 @@
         </p:nvSpPr>
         <p:spPr>
           <a:xfrm>
-            <a:off x="502920" y="6510528"/>
-            <a:ext cx="11185855" cy="256032"/>
+            <a:off x="608076" y="6528816"/>
+            <a:ext cx="11126419" cy="292608"/>
           </a:xfrm>
           <a:prstGeom prst="rect">
             <a:avLst/>
@@ -5499,21 +5914,514 @@
           <a:noFill/>
         </p:spPr>
         <p:txBody>
-          <a:bodyPr wrap="none">
-            <a:spAutoFit/>
+          <a:bodyPr wrap="square" lIns="38100" rIns="38100" tIns="25400" bIns="25400">
+            <a:noAutofit/>
           </a:bodyPr>
           <a:lstStyle/>
           <a:p>
             <a:pPr algn="l"/>
             <a:r>
-              <a:rPr sz="1000" b="0">
+              <a:rPr sz="900" b="0">
                 <a:solidFill>
                   <a:srgbClr val="64748B"/>
                 </a:solidFill>
                 <a:latin typeface="Arial"/>
               </a:rPr>
-              <a:t>Public data · Reproducible code · https://github.com/Aryan7865/cold-hot-tumour-classification</a:t>
-            </a:r>
+              <a:t>References: Charoentong et al., Cell Reports 2017; Yoshihara et al., Nat Commun 2013 (ESTIMATE)</a:t>
+            </a:r>
+          </a:p>
+        </p:txBody>
+      </p:sp>
+    </p:spTree>
+  </p:cSld>
+  <p:clrMapOvr>
+    <a:masterClrMapping/>
+  </p:clrMapOvr>
+</p:sld>
+</file>
+
+<file path=ppt/slides/slide20.xml><?xml version="1.0" encoding="utf-8"?>
+<p:sld xmlns:a="http://schemas.openxmlformats.org/drawingml/2006/main" xmlns:p="http://schemas.openxmlformats.org/presentationml/2006/main" xmlns:r="http://schemas.openxmlformats.org/officeDocument/2006/relationships">
+  <p:cSld>
+    <p:spTree>
+      <p:nvGrpSpPr>
+        <p:cNvPr id="1" name=""/>
+        <p:cNvGrpSpPr/>
+        <p:nvPr/>
+      </p:nvGrpSpPr>
+      <p:grpSpPr/>
+      <p:sp>
+        <p:nvSpPr>
+          <p:cNvPr id="2" name="Rectangle 1"/>
+          <p:cNvSpPr/>
+          <p:nvPr/>
+        </p:nvSpPr>
+        <p:spPr>
+          <a:xfrm>
+            <a:off x="0" y="0"/>
+            <a:ext cx="77724" cy="6858000"/>
+          </a:xfrm>
+          <a:prstGeom prst="rect">
+            <a:avLst/>
+          </a:prstGeom>
+          <a:solidFill>
+            <a:srgbClr val="06B6D4"/>
+          </a:solidFill>
+          <a:ln>
+            <a:noFill/>
+          </a:ln>
+        </p:spPr>
+        <p:style>
+          <a:lnRef idx="1">
+            <a:schemeClr val="accent1"/>
+          </a:lnRef>
+          <a:fillRef idx="3">
+            <a:schemeClr val="accent1"/>
+          </a:fillRef>
+          <a:effectRef idx="2">
+            <a:schemeClr val="accent1"/>
+          </a:effectRef>
+          <a:fontRef idx="minor">
+            <a:schemeClr val="lt1"/>
+          </a:fontRef>
+        </p:style>
+        <p:txBody>
+          <a:bodyPr rtlCol="0" anchor="ctr"/>
+          <a:lstStyle/>
+          <a:p>
+            <a:pPr algn="ctr"/>
+          </a:p>
+        </p:txBody>
+      </p:sp>
+      <p:sp>
+        <p:nvSpPr>
+          <p:cNvPr id="3" name="TextBox 2"/>
+          <p:cNvSpPr txBox="1"/>
+          <p:nvPr/>
+        </p:nvSpPr>
+        <p:spPr>
+          <a:xfrm>
+            <a:off x="608076" y="310896"/>
+            <a:ext cx="11126419" cy="804672"/>
+          </a:xfrm>
+          <a:prstGeom prst="rect">
+            <a:avLst/>
+          </a:prstGeom>
+          <a:noFill/>
+        </p:spPr>
+        <p:txBody>
+          <a:bodyPr wrap="square" lIns="38100" rIns="38100" tIns="25400" bIns="25400">
+            <a:noAutofit/>
+          </a:bodyPr>
+          <a:lstStyle/>
+          <a:p>
+            <a:pPr algn="l"/>
+            <a:r>
+              <a:rPr sz="3000" b="1">
+                <a:solidFill>
+                  <a:srgbClr val="1E293B"/>
+                </a:solidFill>
+                <a:latin typeface="Arial"/>
+              </a:rPr>
+              <a:t>Take-home messages</a:t>
+            </a:r>
+          </a:p>
+          <a:p>
+            <a:pPr>
+              <a:lnSpc>
+                <a:spcPct val="108000"/>
+              </a:lnSpc>
+              <a:spcBef>
+                <a:spcPts val="400"/>
+              </a:spcBef>
+            </a:pPr>
+            <a:r>
+              <a:rPr sz="1200" b="0">
+                <a:solidFill>
+                  <a:srgbClr val="64748B"/>
+                </a:solidFill>
+                <a:latin typeface="Arial"/>
+              </a:rPr>
+              <a:t>What you should remember from this project</a:t>
+            </a:r>
+          </a:p>
+        </p:txBody>
+      </p:sp>
+      <p:sp>
+        <p:nvSpPr>
+          <p:cNvPr id="4" name="TextBox 3"/>
+          <p:cNvSpPr txBox="1"/>
+          <p:nvPr/>
+        </p:nvSpPr>
+        <p:spPr>
+          <a:xfrm>
+            <a:off x="608076" y="1078992"/>
+            <a:ext cx="11126419" cy="5404104"/>
+          </a:xfrm>
+          <a:prstGeom prst="rect">
+            <a:avLst/>
+          </a:prstGeom>
+          <a:noFill/>
+        </p:spPr>
+        <p:txBody>
+          <a:bodyPr wrap="square" lIns="38100" rIns="38100" tIns="25400" bIns="25400">
+            <a:noAutofit/>
+          </a:bodyPr>
+          <a:lstStyle/>
+          <a:p>
+            <a:pPr>
+              <a:lnSpc>
+                <a:spcPct val="108000"/>
+              </a:lnSpc>
+              <a:spcAft>
+                <a:spcPts val="500"/>
+              </a:spcAft>
+            </a:pPr>
+            <a:r>
+              <a:rPr sz="1100" b="0">
+                <a:solidFill>
+                  <a:srgbClr val="1E293B"/>
+                </a:solidFill>
+                <a:latin typeface="Arial"/>
+              </a:rPr>
+              <a:t>▸ We built a reproducible omics pipeline on 403 TCGA colorectal samples with explicit train (COAD) vs test (READ) separation.</a:t>
+            </a:r>
+          </a:p>
+          <a:p>
+            <a:pPr>
+              <a:lnSpc>
+                <a:spcPct val="108000"/>
+              </a:lnSpc>
+              <a:spcAft>
+                <a:spcPts val="500"/>
+              </a:spcAft>
+            </a:pPr>
+            <a:r>
+              <a:rPr sz="1100" b="0">
+                <a:solidFill>
+                  <a:srgbClr val="1E293B"/>
+                </a:solidFill>
+                <a:latin typeface="Arial"/>
+              </a:rPr>
+              <a:t>▸ Genome-wide testing finds 8,198 BH-significant genes by Welch t and 2,269 high-confidence DE genes with large |log₂FC| — enriched for antigen presentation and cytotoxic programmes.</a:t>
+            </a:r>
+          </a:p>
+          <a:p>
+            <a:pPr>
+              <a:lnSpc>
+                <a:spcPct val="108000"/>
+              </a:lnSpc>
+              <a:spcAft>
+                <a:spcPts val="500"/>
+              </a:spcAft>
+            </a:pPr>
+            <a:r>
+              <a:rPr sz="1100" b="0">
+                <a:solidFill>
+                  <a:srgbClr val="1E293B"/>
+                </a:solidFill>
+                <a:latin typeface="Arial"/>
+              </a:rPr>
+              <a:t>▸ Low-dimensional plots (PCA/UMAP) and clustering (ARI 0.114 for best k-means vs labels) show partial but meaningful alignment with immune tertiles.</a:t>
+            </a:r>
+          </a:p>
+          <a:p>
+            <a:pPr>
+              <a:lnSpc>
+                <a:spcPct val="108000"/>
+              </a:lnSpc>
+              <a:spcAft>
+                <a:spcPts val="500"/>
+              </a:spcAft>
+            </a:pPr>
+            <a:r>
+              <a:rPr sz="1100" b="0">
+                <a:solidFill>
+                  <a:srgbClr val="1E293B"/>
+                </a:solidFill>
+                <a:latin typeface="Arial"/>
+              </a:rPr>
+              <a:t>▸ Six classifiers; best discovery performance ≈0.79 balanced accuracy under 5-fold CV (RandomForest).</a:t>
+            </a:r>
+          </a:p>
+          <a:p>
+            <a:pPr>
+              <a:lnSpc>
+                <a:spcPct val="108000"/>
+              </a:lnSpc>
+              <a:spcAft>
+                <a:spcPts val="500"/>
+              </a:spcAft>
+            </a:pPr>
+            <a:r>
+              <a:rPr sz="1100" b="0">
+                <a:solidFill>
+                  <a:srgbClr val="1E293B"/>
+                </a:solidFill>
+                <a:latin typeface="Arial"/>
+              </a:rPr>
+              <a:t>▸ External validation retains ≈0.74 balanced accuracy on 109 READ patients — evidence against pure overfitting.</a:t>
+            </a:r>
+          </a:p>
+          <a:p>
+            <a:pPr>
+              <a:lnSpc>
+                <a:spcPct val="108000"/>
+              </a:lnSpc>
+              <a:spcAft>
+                <a:spcPts val="500"/>
+              </a:spcAft>
+            </a:pPr>
+            <a:r>
+              <a:rPr sz="1100" b="0">
+                <a:solidFill>
+                  <a:srgbClr val="1E293B"/>
+                </a:solidFill>
+                <a:latin typeface="Arial"/>
+              </a:rPr>
+              <a:t>▸ Survival trend is directionally sensible but not statistically significant at α=0.05 (log-rank p=0.081).</a:t>
+            </a:r>
+          </a:p>
+          <a:p>
+            <a:pPr>
+              <a:lnSpc>
+                <a:spcPct val="108000"/>
+              </a:lnSpc>
+              <a:spcAft>
+                <a:spcPts val="500"/>
+              </a:spcAft>
+            </a:pPr>
+            <a:r>
+              <a:rPr sz="1100" b="0">
+                <a:solidFill>
+                  <a:srgbClr val="1E293B"/>
+                </a:solidFill>
+                <a:latin typeface="Arial"/>
+              </a:rPr>
+              <a:t>▸ Everything is scripted in Python with version-pinned dependencies; figures regenerate from outputs/. </a:t>
+            </a:r>
+          </a:p>
+        </p:txBody>
+      </p:sp>
+      <p:sp>
+        <p:nvSpPr>
+          <p:cNvPr id="5" name="TextBox 4"/>
+          <p:cNvSpPr txBox="1"/>
+          <p:nvPr/>
+        </p:nvSpPr>
+        <p:spPr>
+          <a:xfrm>
+            <a:off x="608076" y="6528816"/>
+            <a:ext cx="11126419" cy="292608"/>
+          </a:xfrm>
+          <a:prstGeom prst="rect">
+            <a:avLst/>
+          </a:prstGeom>
+          <a:noFill/>
+        </p:spPr>
+        <p:txBody>
+          <a:bodyPr wrap="square" lIns="38100" rIns="38100" tIns="25400" bIns="25400">
+            <a:noAutofit/>
+          </a:bodyPr>
+          <a:lstStyle/>
+          <a:p>
+            <a:pPr algn="l"/>
+            <a:r>
+              <a:rPr sz="900" b="0">
+                <a:solidFill>
+                  <a:srgbClr val="64748B"/>
+                </a:solidFill>
+                <a:latin typeface="Arial"/>
+              </a:rPr>
+              <a:t>https://github.com/Aryan7865/cold-hot-tumour-classification</a:t>
+            </a:r>
+          </a:p>
+        </p:txBody>
+      </p:sp>
+    </p:spTree>
+  </p:cSld>
+  <p:clrMapOvr>
+    <a:masterClrMapping/>
+  </p:clrMapOvr>
+</p:sld>
+</file>
+
+<file path=ppt/slides/slide21.xml><?xml version="1.0" encoding="utf-8"?>
+<p:sld xmlns:a="http://schemas.openxmlformats.org/drawingml/2006/main" xmlns:p="http://schemas.openxmlformats.org/presentationml/2006/main" xmlns:r="http://schemas.openxmlformats.org/officeDocument/2006/relationships">
+  <p:cSld>
+    <p:spTree>
+      <p:nvGrpSpPr>
+        <p:cNvPr id="1" name=""/>
+        <p:cNvGrpSpPr/>
+        <p:nvPr/>
+      </p:nvGrpSpPr>
+      <p:grpSpPr/>
+      <p:sp>
+        <p:nvSpPr>
+          <p:cNvPr id="2" name="Rectangle 1"/>
+          <p:cNvSpPr/>
+          <p:nvPr/>
+        </p:nvSpPr>
+        <p:spPr>
+          <a:xfrm>
+            <a:off x="0" y="0"/>
+            <a:ext cx="12191695" cy="6858000"/>
+          </a:xfrm>
+          <a:prstGeom prst="rect">
+            <a:avLst/>
+          </a:prstGeom>
+          <a:solidFill>
+            <a:srgbClr val="0F172A"/>
+          </a:solidFill>
+          <a:ln>
+            <a:noFill/>
+          </a:ln>
+        </p:spPr>
+        <p:style>
+          <a:lnRef idx="1">
+            <a:schemeClr val="accent1"/>
+          </a:lnRef>
+          <a:fillRef idx="3">
+            <a:schemeClr val="accent1"/>
+          </a:fillRef>
+          <a:effectRef idx="2">
+            <a:schemeClr val="accent1"/>
+          </a:effectRef>
+          <a:fontRef idx="minor">
+            <a:schemeClr val="lt1"/>
+          </a:fontRef>
+        </p:style>
+        <p:txBody>
+          <a:bodyPr rtlCol="0" anchor="ctr"/>
+          <a:lstStyle/>
+          <a:p>
+            <a:pPr algn="ctr"/>
+          </a:p>
+        </p:txBody>
+      </p:sp>
+      <p:sp>
+        <p:nvSpPr>
+          <p:cNvPr id="3" name="TextBox 2"/>
+          <p:cNvSpPr txBox="1"/>
+          <p:nvPr/>
+        </p:nvSpPr>
+        <p:spPr>
+          <a:xfrm>
+            <a:off x="608076" y="2331720"/>
+            <a:ext cx="11126419" cy="2011680"/>
+          </a:xfrm>
+          <a:prstGeom prst="rect">
+            <a:avLst/>
+          </a:prstGeom>
+          <a:noFill/>
+        </p:spPr>
+        <p:txBody>
+          <a:bodyPr wrap="square" lIns="38100" rIns="38100" tIns="25400" bIns="25400">
+            <a:noAutofit/>
+          </a:bodyPr>
+          <a:lstStyle/>
+          <a:p>
+            <a:pPr algn="ctr"/>
+            <a:r>
+              <a:rPr sz="4000" b="1">
+                <a:solidFill>
+                  <a:srgbClr val="FFFFFF"/>
+                </a:solidFill>
+                <a:latin typeface="Arial"/>
+              </a:rPr>
+              <a:t>Thank you</a:t>
+            </a:r>
+          </a:p>
+          <a:p>
+            <a:pPr algn="ctr">
+              <a:spcBef>
+                <a:spcPts val="1600"/>
+              </a:spcBef>
+            </a:pPr>
+            <a:r>
+              <a:rPr sz="1400" b="0">
+                <a:solidFill>
+                  <a:srgbClr val="94A3B8"/>
+                </a:solidFill>
+                <a:latin typeface="Arial"/>
+              </a:rPr>
+              <a:t>We welcome questions on methods, code, or biological interpretation.</a:t>
+            </a:r>
+          </a:p>
+          <a:p>
+            <a:pPr algn="ctr">
+              <a:spcBef>
+                <a:spcPts val="2200"/>
+              </a:spcBef>
+            </a:pPr>
+            <a:r>
+              <a:rPr sz="2000" b="0">
+                <a:solidFill>
+                  <a:srgbClr val="06B6D4"/>
+                </a:solidFill>
+                <a:latin typeface="Arial"/>
+              </a:rPr>
+              <a:t>Questions?</a:t>
+            </a:r>
+          </a:p>
+          <a:p>
+            <a:pPr algn="ctr">
+              <a:spcBef>
+                <a:spcPts val="2800"/>
+              </a:spcBef>
+            </a:pPr>
+            <a:r>
+              <a:rPr sz="1100" b="0">
+                <a:solidFill>
+                  <a:srgbClr val="94A3B8"/>
+                </a:solidFill>
+                <a:latin typeface="Arial"/>
+              </a:rPr>
+              <a:t>https://github.com/Aryan7865/cold-hot-tumour-classification</a:t>
+            </a:r>
+          </a:p>
+        </p:txBody>
+      </p:sp>
+      <p:sp>
+        <p:nvSpPr>
+          <p:cNvPr id="4" name="Rectangle 3"/>
+          <p:cNvSpPr/>
+          <p:nvPr/>
+        </p:nvSpPr>
+        <p:spPr>
+          <a:xfrm>
+            <a:off x="6022695" y="1874519"/>
+            <a:ext cx="146304" cy="2880360"/>
+          </a:xfrm>
+          <a:prstGeom prst="rect">
+            <a:avLst/>
+          </a:prstGeom>
+          <a:solidFill>
+            <a:srgbClr val="06B6D4"/>
+          </a:solidFill>
+          <a:ln>
+            <a:noFill/>
+          </a:ln>
+        </p:spPr>
+        <p:style>
+          <a:lnRef idx="1">
+            <a:schemeClr val="accent1"/>
+          </a:lnRef>
+          <a:fillRef idx="3">
+            <a:schemeClr val="accent1"/>
+          </a:fillRef>
+          <a:effectRef idx="2">
+            <a:schemeClr val="accent1"/>
+          </a:effectRef>
+          <a:fontRef idx="minor">
+            <a:schemeClr val="lt1"/>
+          </a:fontRef>
+        </p:style>
+        <p:txBody>
+          <a:bodyPr rtlCol="0" anchor="ctr"/>
+          <a:lstStyle/>
+          <a:p>
+            <a:pPr algn="ctr"/>
           </a:p>
         </p:txBody>
       </p:sp>
@@ -5544,7 +6452,7 @@
         <p:spPr>
           <a:xfrm>
             <a:off x="0" y="0"/>
-            <a:ext cx="82296" cy="6858000"/>
+            <a:ext cx="77724" cy="6858000"/>
           </a:xfrm>
           <a:prstGeom prst="rect">
             <a:avLst/>
@@ -5586,8 +6494,8 @@
         </p:nvSpPr>
         <p:spPr>
           <a:xfrm>
-            <a:off x="640080" y="411480"/>
-            <a:ext cx="11002975" cy="1005840"/>
+            <a:off x="608076" y="310896"/>
+            <a:ext cx="11126419" cy="804672"/>
           </a:xfrm>
           <a:prstGeom prst="rect">
             <a:avLst/>
@@ -5595,14 +6503,14 @@
           <a:noFill/>
         </p:spPr>
         <p:txBody>
-          <a:bodyPr wrap="square">
-            <a:spAutoFit/>
+          <a:bodyPr wrap="square" lIns="38100" rIns="38100" tIns="25400" bIns="25400">
+            <a:noAutofit/>
           </a:bodyPr>
           <a:lstStyle/>
           <a:p>
             <a:pPr algn="l"/>
             <a:r>
-              <a:rPr sz="2800" b="1">
+              <a:rPr sz="3000" b="1">
                 <a:solidFill>
                   <a:srgbClr val="1E293B"/>
                 </a:solidFill>
@@ -5613,18 +6521,21 @@
           </a:p>
           <a:p>
             <a:pPr>
+              <a:lnSpc>
+                <a:spcPct val="108000"/>
+              </a:lnSpc>
               <a:spcBef>
-                <a:spcPts val="600"/>
+                <a:spcPts val="400"/>
               </a:spcBef>
             </a:pPr>
             <a:r>
-              <a:rPr sz="1300" b="0">
+              <a:rPr sz="1200" b="0">
                 <a:solidFill>
                   <a:srgbClr val="64748B"/>
                 </a:solidFill>
                 <a:latin typeface="Arial"/>
               </a:rPr>
-              <a:t>Aligned with course workflow</a:t>
+              <a:t>Mapped to the course project workflow</a:t>
             </a:r>
           </a:p>
         </p:txBody>
@@ -5637,8 +6548,8 @@
         </p:nvSpPr>
         <p:spPr>
           <a:xfrm>
-            <a:off x="685800" y="1143000"/>
-            <a:ext cx="11048695" cy="5303520"/>
+            <a:off x="608076" y="1078992"/>
+            <a:ext cx="11126419" cy="5404104"/>
           </a:xfrm>
           <a:prstGeom prst="rect">
             <a:avLst/>
@@ -5646,122 +6557,122 @@
           <a:noFill/>
         </p:spPr>
         <p:txBody>
-          <a:bodyPr wrap="none">
-            <a:spAutoFit/>
+          <a:bodyPr wrap="square" lIns="38100" rIns="38100" tIns="25400" bIns="25400">
+            <a:noAutofit/>
           </a:bodyPr>
           <a:lstStyle/>
           <a:p>
             <a:pPr>
               <a:lnSpc>
-                <a:spcPct val="112000"/>
+                <a:spcPct val="110000"/>
               </a:lnSpc>
               <a:spcAft>
-                <a:spcPts val="800"/>
+                <a:spcPts val="600"/>
               </a:spcAft>
             </a:pPr>
             <a:r>
-              <a:rPr sz="1400" b="0">
+              <a:rPr sz="1200" b="0">
                 <a:solidFill>
                   <a:srgbClr val="1E293B"/>
                 </a:solidFill>
                 <a:latin typeface="Arial"/>
               </a:rPr>
-              <a:t>Do Hot, Cold, and Intermediate tumours differ genome-wide after rigorous multiple-testing correction?</a:t>
+              <a:t>Exploratory: Do PCA, ICA, MDS, t-SNE, and UMAP reveal gradients or clusters that relate to immune-derived Hot/Cold/Intermediate labels?</a:t>
             </a:r>
           </a:p>
           <a:p>
             <a:pPr>
               <a:lnSpc>
-                <a:spcPct val="112000"/>
+                <a:spcPct val="110000"/>
               </a:lnSpc>
               <a:spcAft>
-                <a:spcPts val="800"/>
+                <a:spcPts val="600"/>
               </a:spcAft>
             </a:pPr>
             <a:r>
-              <a:rPr sz="1400" b="0">
+              <a:rPr sz="1200" b="0">
                 <a:solidFill>
                   <a:srgbClr val="1E293B"/>
                 </a:solidFill>
                 <a:latin typeface="Arial"/>
               </a:rPr>
-              <a:t>Do PCA / UMAP / clustering reveal structure that aligns with immune-derived labels?</a:t>
+              <a:t>Hypothesis-driven: After filtering, do tens of thousands of genes show Hot vs Cold differences by parametric and non-parametric tests, with Benjamini–Hochberg and Bonferroni control of false positives?</a:t>
             </a:r>
           </a:p>
           <a:p>
             <a:pPr>
               <a:lnSpc>
-                <a:spcPct val="112000"/>
+                <a:spcPct val="110000"/>
               </a:lnSpc>
               <a:spcAft>
-                <a:spcPts val="800"/>
+                <a:spcPts val="600"/>
               </a:spcAft>
             </a:pPr>
             <a:r>
-              <a:rPr sz="1400" b="0">
+              <a:rPr sz="1200" b="0">
                 <a:solidFill>
                   <a:srgbClr val="1E293B"/>
                 </a:solidFill>
                 <a:latin typeface="Arial"/>
               </a:rPr>
-              <a:t>Which genes and pathways most strongly separate Hot from Cold?</a:t>
+              <a:t>Clustering: Do k-means, hierarchical (Ward), and DBSCAN partitions agree (ARI/AMI) with ssGSEA tertiles?</a:t>
             </a:r>
           </a:p>
           <a:p>
             <a:pPr>
               <a:lnSpc>
-                <a:spcPct val="112000"/>
+                <a:spcPct val="110000"/>
               </a:lnSpc>
               <a:spcAft>
-                <a:spcPts val="800"/>
+                <a:spcPts val="600"/>
               </a:spcAft>
             </a:pPr>
             <a:r>
-              <a:rPr sz="1400" b="0">
+              <a:rPr sz="1200" b="0">
                 <a:solidFill>
                   <a:srgbClr val="1E293B"/>
                 </a:solidFill>
                 <a:latin typeface="Arial"/>
               </a:rPr>
-              <a:t>Can we train classifiers (SVM, Random Forest, XGBoost, …) to predict phenotype from expression?</a:t>
+              <a:t>Classification: Can pipelines including kNN, linear/RBF SVM, logistic regression, Random Forest, and XGBoost predict phenotype under stratified 5-fold CV?</a:t>
             </a:r>
           </a:p>
           <a:p>
             <a:pPr>
               <a:lnSpc>
-                <a:spcPct val="112000"/>
+                <a:spcPct val="110000"/>
               </a:lnSpc>
               <a:spcAft>
-                <a:spcPts val="800"/>
+                <a:spcPts val="600"/>
               </a:spcAft>
             </a:pPr>
             <a:r>
-              <a:rPr sz="1400" b="0">
+              <a:rPr sz="1200" b="0">
                 <a:solidFill>
                   <a:srgbClr val="1E293B"/>
                 </a:solidFill>
                 <a:latin typeface="Arial"/>
               </a:rPr>
-              <a:t>Does the best model generalise to an independent TCGA cohort never seen in training?</a:t>
+              <a:t>Validation: Does the best discovery model generalise to TCGA-READ patients never used in training?</a:t>
             </a:r>
           </a:p>
           <a:p>
             <a:pPr>
               <a:lnSpc>
-                <a:spcPct val="112000"/>
+                <a:spcPct val="110000"/>
               </a:lnSpc>
               <a:spcAft>
-                <a:spcPts val="800"/>
+                <a:spcPts val="600"/>
               </a:spcAft>
             </a:pPr>
             <a:r>
-              <a:rPr sz="1400" b="0">
+              <a:rPr sz="1200" b="0">
                 <a:solidFill>
                   <a:srgbClr val="1E293B"/>
                 </a:solidFill>
                 <a:latin typeface="Arial"/>
               </a:rPr>
-              <a:t>Is overall survival associated with immune phenotype (Kaplan–Meier, log-rank, Cox)?</a:t>
+              <a:t>Outcome: Do Kaplan–Meier curves and Cox/PLS models link immune tertiles to overall survival on COAD?</a:t>
             </a:r>
           </a:p>
         </p:txBody>
@@ -5774,8 +6685,8 @@
         </p:nvSpPr>
         <p:spPr>
           <a:xfrm>
-            <a:off x="502920" y="6510528"/>
-            <a:ext cx="11185855" cy="256032"/>
+            <a:off x="608076" y="6528816"/>
+            <a:ext cx="11126419" cy="292608"/>
           </a:xfrm>
           <a:prstGeom prst="rect">
             <a:avLst/>
@@ -5783,20 +6694,20 @@
           <a:noFill/>
         </p:spPr>
         <p:txBody>
-          <a:bodyPr wrap="none">
-            <a:spAutoFit/>
+          <a:bodyPr wrap="square" lIns="38100" rIns="38100" tIns="25400" bIns="25400">
+            <a:noAutofit/>
           </a:bodyPr>
           <a:lstStyle/>
           <a:p>
             <a:pPr algn="l"/>
             <a:r>
-              <a:rPr sz="1000" b="0">
+              <a:rPr sz="900" b="0">
                 <a:solidFill>
                   <a:srgbClr val="64748B"/>
                 </a:solidFill>
                 <a:latin typeface="Arial"/>
               </a:rPr>
-              <a:t>Hypothesis-driven analysis + classification + validation</a:t>
+              <a:t>Presentation target: 7 min talk + 3 min Q&amp;A (per course schedule)</a:t>
             </a:r>
           </a:p>
         </p:txBody>
@@ -5828,7 +6739,7 @@
         <p:spPr>
           <a:xfrm>
             <a:off x="0" y="0"/>
-            <a:ext cx="82296" cy="6858000"/>
+            <a:ext cx="77724" cy="6858000"/>
           </a:xfrm>
           <a:prstGeom prst="rect">
             <a:avLst/>
@@ -5870,8 +6781,8 @@
         </p:nvSpPr>
         <p:spPr>
           <a:xfrm>
-            <a:off x="640080" y="411480"/>
-            <a:ext cx="11002975" cy="1005840"/>
+            <a:off x="608076" y="310896"/>
+            <a:ext cx="11126419" cy="804672"/>
           </a:xfrm>
           <a:prstGeom prst="rect">
             <a:avLst/>
@@ -5879,36 +6790,39 @@
           <a:noFill/>
         </p:spPr>
         <p:txBody>
-          <a:bodyPr wrap="square">
-            <a:spAutoFit/>
+          <a:bodyPr wrap="square" lIns="38100" rIns="38100" tIns="25400" bIns="25400">
+            <a:noAutofit/>
           </a:bodyPr>
           <a:lstStyle/>
           <a:p>
             <a:pPr algn="l"/>
             <a:r>
-              <a:rPr sz="2800" b="1">
+              <a:rPr sz="3000" b="1">
                 <a:solidFill>
                   <a:srgbClr val="1E293B"/>
                 </a:solidFill>
                 <a:latin typeface="Arial"/>
               </a:rPr>
-              <a:t>Dataset &amp; study design</a:t>
+              <a:t>Data acquisition &amp; cohort design</a:t>
             </a:r>
           </a:p>
           <a:p>
             <a:pPr>
+              <a:lnSpc>
+                <a:spcPct val="108000"/>
+              </a:lnSpc>
               <a:spcBef>
-                <a:spcPts val="600"/>
+                <a:spcPts val="400"/>
               </a:spcBef>
             </a:pPr>
             <a:r>
-              <a:rPr sz="1300" b="0">
+              <a:rPr sz="1200" b="0">
                 <a:solidFill>
                   <a:srgbClr val="64748B"/>
                 </a:solidFill>
                 <a:latin typeface="Arial"/>
               </a:rPr>
-              <a:t>TCGA RNA-seq · Same pipeline · Two cohorts</a:t>
+              <a:t>TCGA GDC · STAR unstranded counts · harmonised gene symbols</a:t>
             </a:r>
           </a:p>
         </p:txBody>
@@ -5922,8 +6836,8 @@
           <p:nvPr/>
         </p:nvGraphicFramePr>
         <p:xfrm>
-          <a:off x="640080" y="1234440"/>
-          <a:ext cx="10789920" cy="1417320"/>
+          <a:off x="608076" y="1078992"/>
+          <a:ext cx="10903890.62" cy="1298448"/>
         </p:xfrm>
         <a:graphic>
           <a:graphicData uri="http://schemas.openxmlformats.org/drawingml/2006/table">
@@ -5932,21 +6846,21 @@
                 <a:tableStyleId>{5C22544A-7EE6-4342-B048-85BDC9FD1C3A}</a:tableStyleId>
               </a:tblPr>
               <a:tblGrid>
-                <a:gridCol w="1798320"/>
-                <a:gridCol w="1798320"/>
-                <a:gridCol w="1798320"/>
-                <a:gridCol w="1798320"/>
-                <a:gridCol w="1798320"/>
-                <a:gridCol w="1798320"/>
+                <a:gridCol w="1817315"/>
+                <a:gridCol w="1817315"/>
+                <a:gridCol w="1817315"/>
+                <a:gridCol w="1817315"/>
+                <a:gridCol w="1817315"/>
+                <a:gridCol w="1817315"/>
               </a:tblGrid>
-              <a:tr h="354330">
+              <a:tr h="324612">
                 <a:tc>
                   <a:txBody>
                     <a:bodyPr/>
                     <a:lstStyle/>
                     <a:p>
                       <a:r>
-                        <a:rPr sz="1300" b="1">
+                        <a:rPr sz="1200" b="1">
                           <a:solidFill>
                             <a:srgbClr val="FFFFFF"/>
                           </a:solidFill>
@@ -5968,7 +6882,7 @@
                     <a:lstStyle/>
                     <a:p>
                       <a:r>
-                        <a:rPr sz="1300" b="1">
+                        <a:rPr sz="1200" b="1">
                           <a:solidFill>
                             <a:srgbClr val="FFFFFF"/>
                           </a:solidFill>
@@ -5990,13 +6904,13 @@
                     <a:lstStyle/>
                     <a:p>
                       <a:r>
-                        <a:rPr sz="1300" b="1">
+                        <a:rPr sz="1200" b="1">
                           <a:solidFill>
                             <a:srgbClr val="FFFFFF"/>
                           </a:solidFill>
                           <a:latin typeface="Arial"/>
                         </a:rPr>
-                        <a:t>Samples</a:t>
+                        <a:t>n</a:t>
                       </a:r>
                     </a:p>
                   </a:txBody>
@@ -6012,7 +6926,7 @@
                     <a:lstStyle/>
                     <a:p>
                       <a:r>
-                        <a:rPr sz="1300" b="1">
+                        <a:rPr sz="1200" b="1">
                           <a:solidFill>
                             <a:srgbClr val="FFFFFF"/>
                           </a:solidFill>
@@ -6034,7 +6948,7 @@
                     <a:lstStyle/>
                     <a:p>
                       <a:r>
-                        <a:rPr sz="1300" b="1">
+                        <a:rPr sz="1200" b="1">
                           <a:solidFill>
                             <a:srgbClr val="FFFFFF"/>
                           </a:solidFill>
@@ -6056,7 +6970,7 @@
                     <a:lstStyle/>
                     <a:p>
                       <a:r>
-                        <a:rPr sz="1300" b="1">
+                        <a:rPr sz="1200" b="1">
                           <a:solidFill>
                             <a:srgbClr val="FFFFFF"/>
                           </a:solidFill>
@@ -6073,20 +6987,20 @@
                   </a:tcPr>
                 </a:tc>
               </a:tr>
-              <a:tr h="354330">
+              <a:tr h="324612">
                 <a:tc>
                   <a:txBody>
                     <a:bodyPr/>
                     <a:lstStyle/>
                     <a:p>
                       <a:r>
-                        <a:rPr sz="1300" b="0">
+                        <a:rPr sz="1200" b="0">
                           <a:solidFill>
                             <a:srgbClr val="1E293B"/>
                           </a:solidFill>
                           <a:latin typeface="Arial"/>
                         </a:rPr>
-                        <a:t>Discovery / CV</a:t>
+                        <a:t>Discovery + CV</a:t>
                       </a:r>
                     </a:p>
                   </a:txBody>
@@ -6102,7 +7016,7 @@
                     <a:lstStyle/>
                     <a:p>
                       <a:r>
-                        <a:rPr sz="1300" b="0">
+                        <a:rPr sz="1200" b="0">
                           <a:solidFill>
                             <a:srgbClr val="1E293B"/>
                           </a:solidFill>
@@ -6124,7 +7038,7 @@
                     <a:lstStyle/>
                     <a:p>
                       <a:r>
-                        <a:rPr sz="1300" b="0">
+                        <a:rPr sz="1200" b="0">
                           <a:solidFill>
                             <a:srgbClr val="1E293B"/>
                           </a:solidFill>
@@ -6146,7 +7060,7 @@
                     <a:lstStyle/>
                     <a:p>
                       <a:r>
-                        <a:rPr sz="1300" b="0">
+                        <a:rPr sz="1200" b="0">
                           <a:solidFill>
                             <a:srgbClr val="1E293B"/>
                           </a:solidFill>
@@ -6168,7 +7082,7 @@
                     <a:lstStyle/>
                     <a:p>
                       <a:r>
-                        <a:rPr sz="1300" b="0">
+                        <a:rPr sz="1200" b="0">
                           <a:solidFill>
                             <a:srgbClr val="1E293B"/>
                           </a:solidFill>
@@ -6190,7 +7104,7 @@
                     <a:lstStyle/>
                     <a:p>
                       <a:r>
-                        <a:rPr sz="1300" b="0">
+                        <a:rPr sz="1200" b="0">
                           <a:solidFill>
                             <a:srgbClr val="1E293B"/>
                           </a:solidFill>
@@ -6207,20 +7121,20 @@
                   </a:tcPr>
                 </a:tc>
               </a:tr>
-              <a:tr h="354330">
+              <a:tr h="324612">
                 <a:tc>
                   <a:txBody>
                     <a:bodyPr/>
                     <a:lstStyle/>
                     <a:p>
                       <a:r>
-                        <a:rPr sz="1300" b="0">
+                        <a:rPr sz="1200" b="0">
                           <a:solidFill>
                             <a:srgbClr val="1E293B"/>
                           </a:solidFill>
                           <a:latin typeface="Arial"/>
                         </a:rPr>
-                        <a:t>External validation</a:t>
+                        <a:t>External test</a:t>
                       </a:r>
                     </a:p>
                   </a:txBody>
@@ -6236,7 +7150,7 @@
                     <a:lstStyle/>
                     <a:p>
                       <a:r>
-                        <a:rPr sz="1300" b="0">
+                        <a:rPr sz="1200" b="0">
                           <a:solidFill>
                             <a:srgbClr val="1E293B"/>
                           </a:solidFill>
@@ -6258,7 +7172,7 @@
                     <a:lstStyle/>
                     <a:p>
                       <a:r>
-                        <a:rPr sz="1300" b="0">
+                        <a:rPr sz="1200" b="0">
                           <a:solidFill>
                             <a:srgbClr val="1E293B"/>
                           </a:solidFill>
@@ -6280,7 +7194,7 @@
                     <a:lstStyle/>
                     <a:p>
                       <a:r>
-                        <a:rPr sz="1300" b="0">
+                        <a:rPr sz="1200" b="0">
                           <a:solidFill>
                             <a:srgbClr val="1E293B"/>
                           </a:solidFill>
@@ -6302,7 +7216,7 @@
                     <a:lstStyle/>
                     <a:p>
                       <a:r>
-                        <a:rPr sz="1300" b="0">
+                        <a:rPr sz="1200" b="0">
                           <a:solidFill>
                             <a:srgbClr val="1E293B"/>
                           </a:solidFill>
@@ -6324,7 +7238,7 @@
                     <a:lstStyle/>
                     <a:p>
                       <a:r>
-                        <a:rPr sz="1300" b="0">
+                        <a:rPr sz="1200" b="0">
                           <a:solidFill>
                             <a:srgbClr val="1E293B"/>
                           </a:solidFill>
@@ -6341,20 +7255,20 @@
                   </a:tcPr>
                 </a:tc>
               </a:tr>
-              <a:tr h="354330">
+              <a:tr h="324612">
                 <a:tc>
                   <a:txBody>
                     <a:bodyPr/>
                     <a:lstStyle/>
                     <a:p>
                       <a:r>
-                        <a:rPr sz="1300" b="1">
+                        <a:rPr sz="1200" b="1">
                           <a:solidFill>
                             <a:srgbClr val="1E293B"/>
                           </a:solidFill>
                           <a:latin typeface="Arial"/>
                         </a:rPr>
-                        <a:t>Total</a:t>
+                        <a:t>Total patients</a:t>
                       </a:r>
                     </a:p>
                   </a:txBody>
@@ -6370,7 +7284,7 @@
                     <a:lstStyle/>
                     <a:p>
                       <a:r>
-                        <a:rPr sz="1300" b="1">
+                        <a:rPr sz="1200" b="1">
                           <a:solidFill>
                             <a:srgbClr val="1E293B"/>
                           </a:solidFill>
@@ -6392,7 +7306,7 @@
                     <a:lstStyle/>
                     <a:p>
                       <a:r>
-                        <a:rPr sz="1300" b="1">
+                        <a:rPr sz="1200" b="1">
                           <a:solidFill>
                             <a:srgbClr val="1E293B"/>
                           </a:solidFill>
@@ -6414,7 +7328,7 @@
                     <a:lstStyle/>
                     <a:p>
                       <a:r>
-                        <a:rPr sz="1300" b="1">
+                        <a:rPr sz="1200" b="1">
                           <a:solidFill>
                             <a:srgbClr val="1E293B"/>
                           </a:solidFill>
@@ -6436,7 +7350,7 @@
                     <a:lstStyle/>
                     <a:p>
                       <a:r>
-                        <a:rPr sz="1300" b="1">
+                        <a:rPr sz="1200" b="1">
                           <a:solidFill>
                             <a:srgbClr val="1E293B"/>
                           </a:solidFill>
@@ -6458,7 +7372,7 @@
                     <a:lstStyle/>
                     <a:p>
                       <a:r>
-                        <a:rPr sz="1300" b="1">
+                        <a:rPr sz="1200" b="1">
                           <a:solidFill>
                             <a:srgbClr val="1E293B"/>
                           </a:solidFill>
@@ -6487,8 +7401,8 @@
         </p:nvSpPr>
         <p:spPr>
           <a:xfrm>
-            <a:off x="640080" y="2880360"/>
-            <a:ext cx="11185855" cy="3474720"/>
+            <a:off x="608076" y="2468880"/>
+            <a:ext cx="11126419" cy="4023360"/>
           </a:xfrm>
           <a:prstGeom prst="rect">
             <a:avLst/>
@@ -6496,56 +7410,46 @@
           <a:noFill/>
         </p:spPr>
         <p:txBody>
-          <a:bodyPr wrap="none">
-            <a:spAutoFit/>
+          <a:bodyPr wrap="square" lIns="38100" rIns="38100" tIns="25400" bIns="25400">
+            <a:noAutofit/>
           </a:bodyPr>
           <a:lstStyle/>
           <a:p>
             <a:pPr algn="l">
               <a:lnSpc>
-                <a:spcPct val="115000"/>
+                <a:spcPct val="112000"/>
               </a:lnSpc>
             </a:pPr>
             <a:r>
-              <a:rPr sz="1400" b="0">
+              <a:rPr sz="1100" b="0">
                 <a:solidFill>
                   <a:srgbClr val="1E293B"/>
                 </a:solidFill>
                 <a:latin typeface="Arial"/>
               </a:rPr>
-              <a:t>Labels: ssGSEA + ESTIMATE immune scores, tertile split per cohort (top third = Hot, bottom = Cold, middle = Intermediate).</a:t>
+              <a:t>Acquisition: NCI Genomic Data Commons REST API; expression files downloaded in batches with retries (single large tar streams often truncated on unstable links). Parsed STAR counts collapsed to gene-symbol × sample matrices; duplicate gene symbols and replicate aliquots were merged per our parser.</a:t>
             </a:r>
             <a:br/>
             <a:br/>
             <a:r>
-              <a:rPr sz="1400" b="0">
+              <a:rPr sz="1100" b="0">
                 <a:solidFill>
                   <a:srgbClr val="1E293B"/>
                 </a:solidFill>
                 <a:latin typeface="Arial"/>
               </a:rPr>
-              <a:t>Per-gene statistics: 16,723 genes tested on COAD after filtering.</a:t>
-            </a:r>
-            <a:br/>
-            <a:r>
-              <a:rPr sz="1400" b="0">
-                <a:solidFill>
-                  <a:srgbClr val="1E293B"/>
-                </a:solidFill>
-                <a:latin typeface="Arial"/>
-              </a:rPr>
-              <a:t>Machine learning: top 5,000 variance genes; SelectKBest (k=500) inside each pipeline; stratified 5-fold CV on COAD only.</a:t>
+              <a:t>Phenotype labels: single-sample GSEA (gseapy) plus ESTIMATE immune/stromal scores; within each cohort, samples ranked by immune score and split into upper, middle, and lower thirds (Hot / Intermediate / Cold). This yields roughly balanced classes for classification.</a:t>
             </a:r>
             <a:br/>
             <a:br/>
             <a:r>
-              <a:rPr sz="1400" b="0">
+              <a:rPr sz="1100" b="0">
                 <a:solidFill>
                   <a:srgbClr val="1E293B"/>
                 </a:solidFill>
                 <a:latin typeface="Arial"/>
               </a:rPr>
-              <a:t>External test: best CV model trained on full COAD, evaluated on READ with gene alignment + zero imputation.</a:t>
+              <a:t>Downstream statistics use 16,723 filtered genes on COAD for per-gene tests; machine learning uses the top 5,000 variance genes with univariate ANOVA feature selection (k=500) inside each sklearn Pipeline. External validation freezes the best COAD CV model, retrains on all COAD samples, scores READ after aligning gene order (missing genes in test filled with 0).</a:t>
             </a:r>
           </a:p>
         </p:txBody>
@@ -6558,8 +7462,8 @@
         </p:nvSpPr>
         <p:spPr>
           <a:xfrm>
-            <a:off x="502920" y="6510528"/>
-            <a:ext cx="11185855" cy="256032"/>
+            <a:off x="608076" y="6528816"/>
+            <a:ext cx="11126419" cy="292608"/>
           </a:xfrm>
           <a:prstGeom prst="rect">
             <a:avLst/>
@@ -6567,20 +7471,20 @@
           <a:noFill/>
         </p:spPr>
         <p:txBody>
-          <a:bodyPr wrap="none">
-            <a:spAutoFit/>
+          <a:bodyPr wrap="square" lIns="38100" rIns="38100" tIns="25400" bIns="25400">
+            <a:noAutofit/>
           </a:bodyPr>
           <a:lstStyle/>
           <a:p>
             <a:pPr algn="l"/>
             <a:r>
-              <a:rPr sz="1000" b="0">
+              <a:rPr sz="900" b="0">
                 <a:solidFill>
                   <a:srgbClr val="64748B"/>
                 </a:solidFill>
                 <a:latin typeface="Arial"/>
               </a:rPr>
-              <a:t>GDC acquisition with batched downloads + retries (resilient to dropped connections)</a:t>
+              <a:t>config.py: TCGA_PROJECTS = ['TCGA-COAD'], VALIDATION_COHORT = 'TCGA-READ'</a:t>
             </a:r>
           </a:p>
         </p:txBody>
@@ -6612,7 +7516,7 @@
         <p:spPr>
           <a:xfrm>
             <a:off x="0" y="0"/>
-            <a:ext cx="82296" cy="6858000"/>
+            <a:ext cx="77724" cy="6858000"/>
           </a:xfrm>
           <a:prstGeom prst="rect">
             <a:avLst/>
@@ -6654,8 +7558,8 @@
         </p:nvSpPr>
         <p:spPr>
           <a:xfrm>
-            <a:off x="640080" y="411480"/>
-            <a:ext cx="11002975" cy="1005840"/>
+            <a:off x="608076" y="310896"/>
+            <a:ext cx="11126419" cy="804672"/>
           </a:xfrm>
           <a:prstGeom prst="rect">
             <a:avLst/>
@@ -6663,36 +7567,39 @@
           <a:noFill/>
         </p:spPr>
         <p:txBody>
-          <a:bodyPr wrap="square">
-            <a:spAutoFit/>
+          <a:bodyPr wrap="square" lIns="38100" rIns="38100" tIns="25400" bIns="25400">
+            <a:noAutofit/>
           </a:bodyPr>
           <a:lstStyle/>
           <a:p>
             <a:pPr algn="l"/>
             <a:r>
-              <a:rPr sz="2800" b="1">
+              <a:rPr sz="3000" b="1">
                 <a:solidFill>
                   <a:srgbClr val="1E293B"/>
                 </a:solidFill>
                 <a:latin typeface="Arial"/>
               </a:rPr>
-              <a:t>Analytical workflow</a:t>
+              <a:t>End-to-end analytical workflow</a:t>
             </a:r>
           </a:p>
           <a:p>
             <a:pPr>
+              <a:lnSpc>
+                <a:spcPct val="108000"/>
+              </a:lnSpc>
               <a:spcBef>
-                <a:spcPts val="600"/>
+                <a:spcPts val="400"/>
               </a:spcBef>
             </a:pPr>
             <a:r>
-              <a:rPr sz="1300" b="0">
+              <a:rPr sz="1200" b="0">
                 <a:solidFill>
                   <a:srgbClr val="64748B"/>
                 </a:solidFill>
                 <a:latin typeface="Arial"/>
               </a:rPr>
-              <a:t>From raw counts to validation — one pipeline</a:t>
+              <a:t>Ten numbered scripts · one config · shared outputs/</a:t>
             </a:r>
           </a:p>
         </p:txBody>
@@ -6705,8 +7612,8 @@
         </p:nvSpPr>
         <p:spPr>
           <a:xfrm>
-            <a:off x="640080" y="1188720"/>
-            <a:ext cx="11094415" cy="2148840"/>
+            <a:off x="608076" y="1078992"/>
+            <a:ext cx="11126419" cy="1874519"/>
           </a:xfrm>
           <a:prstGeom prst="rect">
             <a:avLst/>
@@ -6714,64 +7621,114 @@
           <a:noFill/>
         </p:spPr>
         <p:txBody>
-          <a:bodyPr wrap="none">
-            <a:spAutoFit/>
+          <a:bodyPr wrap="square" lIns="38100" rIns="38100" tIns="25400" bIns="25400">
+            <a:noAutofit/>
           </a:bodyPr>
           <a:lstStyle/>
           <a:p>
             <a:pPr algn="l">
               <a:lnSpc>
-                <a:spcPct val="115000"/>
+                <a:spcPct val="112000"/>
               </a:lnSpc>
             </a:pPr>
             <a:r>
-              <a:rPr sz="1400" b="0">
+              <a:rPr sz="1100" b="0">
                 <a:solidFill>
                   <a:srgbClr val="1E293B"/>
                 </a:solidFill>
                 <a:latin typeface="Arial"/>
               </a:rPr>
-              <a:t>① Acquire &amp; parse TCGA STAR counts  →  ② Filter / log-transform / harmonise</a:t>
+              <a:t>① 01_data_acquisition — GDC bulk + clinical.</a:t>
             </a:r>
             <a:br/>
             <a:r>
-              <a:rPr sz="1400" b="0">
+              <a:rPr sz="1100" b="0">
                 <a:solidFill>
                   <a:srgbClr val="1E293B"/>
                 </a:solidFill>
                 <a:latin typeface="Arial"/>
               </a:rPr>
-              <a:t>③ ssGSEA + ESTIMATE → Hot | Cold | Intermediate  →  ④ PCA · ICA · MDS · t-SNE · UMAP</a:t>
+              <a:t>② 02_preprocessing — CPM, log₂, expression filters, top-variance subset, optional Shapiro/QQ.</a:t>
             </a:r>
             <a:br/>
             <a:r>
-              <a:rPr sz="1400" b="0">
+              <a:rPr sz="1100" b="0">
                 <a:solidFill>
                   <a:srgbClr val="1E293B"/>
                 </a:solidFill>
                 <a:latin typeface="Arial"/>
               </a:rPr>
-              <a:t>⑤ k-means · hierarchical · DBSCAN  →  ⑥ t · ANOVA · Kruskal–Wallis · Mann–Whitney · F-test · χ²</a:t>
+              <a:t>③ 03_immune_scoring — ssGSEA + ESTIMATE → labels + immune_scores tables.</a:t>
             </a:r>
             <a:br/>
             <a:r>
-              <a:rPr sz="1400" b="0">
+              <a:rPr sz="1100" b="0">
                 <a:solidFill>
                   <a:srgbClr val="1E293B"/>
                 </a:solidFill>
                 <a:latin typeface="Arial"/>
               </a:rPr>
-              <a:t>        BH + Bonferroni correction  →  ⑦ Six classifiers + 5-fold CV</a:t>
+              <a:t>④ 04_dimensionality_reduction — PCA, ICA, MDS, t-SNE, UMAP plots.</a:t>
             </a:r>
             <a:br/>
             <a:r>
-              <a:rPr sz="1400" b="0">
+              <a:rPr sz="1100" b="0">
                 <a:solidFill>
                   <a:srgbClr val="1E293B"/>
                 </a:solidFill>
                 <a:latin typeface="Arial"/>
               </a:rPr>
-              <a:t>⑧ KM · log-rank · Cox · PLS  →  ⑨ Train COAD → test READ  →  ⑩ Report figures + this deck</a:t>
+              <a:t>⑤ 05_clustering — k-means sweep, Ward dendrogram, DBSCAN; ARI/AMI vs labels.</a:t>
+            </a:r>
+            <a:br/>
+            <a:r>
+              <a:rPr sz="1100" b="0">
+                <a:solidFill>
+                  <a:srgbClr val="1E293B"/>
+                </a:solidFill>
+                <a:latin typeface="Arial"/>
+              </a:rPr>
+              <a:t>⑥ 06_hypothesis_testing — per-gene tests + BH/Bonferroni; volcano + heatmaps; χ² on clinical tables.</a:t>
+            </a:r>
+            <a:br/>
+            <a:r>
+              <a:rPr sz="1100" b="0">
+                <a:solidFill>
+                  <a:srgbClr val="1E293B"/>
+                </a:solidFill>
+                <a:latin typeface="Arial"/>
+              </a:rPr>
+              <a:t>⑦ 07_classification — six models, stratified 5-fold CV, confusion + ROC.</a:t>
+            </a:r>
+            <a:br/>
+            <a:r>
+              <a:rPr sz="1100" b="0">
+                <a:solidFill>
+                  <a:srgbClr val="1E293B"/>
+                </a:solidFill>
+                <a:latin typeface="Arial"/>
+              </a:rPr>
+              <a:t>⑧ 08_survival_analysis — KM, log-rank, penalised Cox, PLS vs survival time.</a:t>
+            </a:r>
+            <a:br/>
+            <a:r>
+              <a:rPr sz="1100" b="0">
+                <a:solidFill>
+                  <a:srgbClr val="1E293B"/>
+                </a:solidFill>
+                <a:latin typeface="Arial"/>
+              </a:rPr>
+              <a:t>⑨ 09_validation_external — train COAD → evaluate READ.</a:t>
+            </a:r>
+            <a:br/>
+            <a:r>
+              <a:rPr sz="1100" b="0">
+                <a:solidFill>
+                  <a:srgbClr val="1E293B"/>
+                </a:solidFill>
+                <a:latin typeface="Arial"/>
+              </a:rPr>
+              <a:t>⑩ 10_final_report_figures + report PDF / this PPTX generator.</a:t>
             </a:r>
           </a:p>
         </p:txBody>
@@ -6784,8 +7741,8 @@
         </p:nvSpPr>
         <p:spPr>
           <a:xfrm>
-            <a:off x="612648" y="3520440"/>
-            <a:ext cx="11076127" cy="2880360"/>
+            <a:off x="608076" y="3026663"/>
+            <a:ext cx="11126419" cy="3465577"/>
           </a:xfrm>
           <a:prstGeom prst="rect">
             <a:avLst/>
@@ -6829,8 +7786,8 @@
         </p:nvSpPr>
         <p:spPr>
           <a:xfrm>
-            <a:off x="822960" y="3703320"/>
-            <a:ext cx="10728655" cy="2606040"/>
+            <a:off x="717804" y="3118103"/>
+            <a:ext cx="10906963" cy="3337561"/>
           </a:xfrm>
           <a:prstGeom prst="rect">
             <a:avLst/>
@@ -6838,24 +7795,24 @@
           <a:noFill/>
         </p:spPr>
         <p:txBody>
-          <a:bodyPr wrap="none">
-            <a:spAutoFit/>
+          <a:bodyPr wrap="square" lIns="38100" rIns="38100" tIns="25400" bIns="25400">
+            <a:noAutofit/>
           </a:bodyPr>
           <a:lstStyle/>
           <a:p>
             <a:pPr algn="l">
               <a:lnSpc>
-                <a:spcPct val="115000"/>
+                <a:spcPct val="112000"/>
               </a:lnSpc>
             </a:pPr>
             <a:r>
-              <a:rPr sz="1400" b="0">
+              <a:rPr sz="1200" b="0">
                 <a:solidFill>
                   <a:srgbClr val="1E293B"/>
                 </a:solidFill>
                 <a:latin typeface="Arial"/>
               </a:rPr>
-              <a:t>Course coverage in one slide: visual stats + dimensionality reduction + clustering + hypothesis testing + FDR + supervised ML + regression-style survival modelling + external validation + biological interpretation.</a:t>
+              <a:t>Together, these steps exercise the course rubric: visual exploration, parametric and non-parametric inference with multiple-testing correction, unsupervised and supervised learning, regression-style survival modelling, and biological interpretation against known immune-gene programmes. Every figure in this deck is taken from outputs/figures/ produced by the pipeline (regenerate after re-running scripts).</a:t>
             </a:r>
           </a:p>
         </p:txBody>
@@ -6868,8 +7825,8 @@
         </p:nvSpPr>
         <p:spPr>
           <a:xfrm>
-            <a:off x="502920" y="6510528"/>
-            <a:ext cx="11185855" cy="256032"/>
+            <a:off x="608076" y="6528816"/>
+            <a:ext cx="11126419" cy="292608"/>
           </a:xfrm>
           <a:prstGeom prst="rect">
             <a:avLst/>
@@ -6877,20 +7834,20 @@
           <a:noFill/>
         </p:spPr>
         <p:txBody>
-          <a:bodyPr wrap="none">
-            <a:spAutoFit/>
+          <a:bodyPr wrap="square" lIns="38100" rIns="38100" tIns="25400" bIns="25400">
+            <a:noAutofit/>
           </a:bodyPr>
           <a:lstStyle/>
           <a:p>
             <a:pPr algn="l"/>
             <a:r>
-              <a:rPr sz="1000" b="0">
+              <a:rPr sz="900" b="0">
                 <a:solidFill>
                   <a:srgbClr val="64748B"/>
                 </a:solidFill>
                 <a:latin typeface="Arial"/>
               </a:rPr>
-              <a:t>All scripts: 01_data_acquisition.py … 10_final_report_figures.py</a:t>
+              <a:t>Repository layout: data/raw, data/processed, outputs/tables, outputs/figures, outputs/models</a:t>
             </a:r>
           </a:p>
         </p:txBody>
@@ -6922,7 +7879,7 @@
         <p:spPr>
           <a:xfrm>
             <a:off x="0" y="0"/>
-            <a:ext cx="82296" cy="6858000"/>
+            <a:ext cx="77724" cy="6858000"/>
           </a:xfrm>
           <a:prstGeom prst="rect">
             <a:avLst/>
@@ -6964,8 +7921,8 @@
         </p:nvSpPr>
         <p:spPr>
           <a:xfrm>
-            <a:off x="640080" y="411480"/>
-            <a:ext cx="11002975" cy="1005840"/>
+            <a:off x="608076" y="310896"/>
+            <a:ext cx="11126419" cy="804672"/>
           </a:xfrm>
           <a:prstGeom prst="rect">
             <a:avLst/>
@@ -6973,36 +7930,39 @@
           <a:noFill/>
         </p:spPr>
         <p:txBody>
-          <a:bodyPr wrap="square">
-            <a:spAutoFit/>
+          <a:bodyPr wrap="square" lIns="38100" rIns="38100" tIns="25400" bIns="25400">
+            <a:noAutofit/>
           </a:bodyPr>
           <a:lstStyle/>
           <a:p>
             <a:pPr algn="l"/>
             <a:r>
-              <a:rPr sz="2800" b="1">
+              <a:rPr sz="3000" b="1">
                 <a:solidFill>
                   <a:srgbClr val="1E293B"/>
                 </a:solidFill>
                 <a:latin typeface="Arial"/>
               </a:rPr>
-              <a:t>Methods &amp; key parameters</a:t>
+              <a:t>Methods (1/2)</a:t>
             </a:r>
           </a:p>
           <a:p>
             <a:pPr>
+              <a:lnSpc>
+                <a:spcPct val="108000"/>
+              </a:lnSpc>
               <a:spcBef>
-                <a:spcPts val="600"/>
+                <a:spcPts val="400"/>
               </a:spcBef>
             </a:pPr>
             <a:r>
-              <a:rPr sz="1300" b="0">
+              <a:rPr sz="1200" b="0">
                 <a:solidFill>
                   <a:srgbClr val="64748B"/>
                 </a:solidFill>
                 <a:latin typeface="Arial"/>
               </a:rPr>
-              <a:t>Documented in code + README — reproducible</a:t>
+              <a:t>Preprocessing, labelling, dimensionality reduction, clustering</a:t>
             </a:r>
           </a:p>
         </p:txBody>
@@ -7015,8 +7975,8 @@
         </p:nvSpPr>
         <p:spPr>
           <a:xfrm>
-            <a:off x="667512" y="1115568"/>
-            <a:ext cx="11076127" cy="5440680"/>
+            <a:off x="608076" y="1078992"/>
+            <a:ext cx="11126419" cy="5404104"/>
           </a:xfrm>
           <a:prstGeom prst="rect">
             <a:avLst/>
@@ -7024,68 +7984,57 @@
           <a:noFill/>
         </p:spPr>
         <p:txBody>
-          <a:bodyPr wrap="none">
-            <a:spAutoFit/>
+          <a:bodyPr wrap="square" lIns="38100" rIns="38100" tIns="25400" bIns="25400">
+            <a:noAutofit/>
           </a:bodyPr>
           <a:lstStyle/>
           <a:p>
             <a:pPr algn="l">
               <a:lnSpc>
-                <a:spcPct val="115000"/>
+                <a:spcPct val="112000"/>
               </a:lnSpc>
             </a:pPr>
             <a:r>
-              <a:rPr sz="1300" b="0">
+              <a:rPr sz="1100" b="0">
                 <a:solidFill>
                   <a:srgbClr val="1E293B"/>
                 </a:solidFill>
                 <a:latin typeface="Arial"/>
               </a:rPr>
-              <a:t>Preprocessing: CPM → log₂(count+1); keep genes with ≥ 1 CPM in ≥ 20% of samples; ML features = top 5,000 variance genes.</a:t>
+              <a:t>Preprocessing (02_preprocessing.py): raw counts converted to counts-per-million (CPM); genes kept if CPM ≥ 1 in at least 20% of samples; then log₂(x + 1). For ML we retain the top 5,000 genes by row-wise variance to stabilise estimation in n≈300 samples.</a:t>
             </a:r>
             <a:br/>
             <a:br/>
             <a:r>
-              <a:rPr sz="1300" b="0">
+              <a:rPr sz="1100" b="0">
                 <a:solidFill>
                   <a:srgbClr val="1E293B"/>
                 </a:solidFill>
                 <a:latin typeface="Arial"/>
               </a:rPr>
-              <a:t>Immune labels: ssGSEA + ESTIMATE; tertile split within cohort — Hot = highest third, Cold = lowest third, Intermediate = middle third of immune score.</a:t>
+              <a:t>Immune scoring (03_immune_scoring.py): ssGSEA enrichment scores for curated immune gene sets combined with ESTIMATE immune and stromal scores. Labels assigned by within-cohort tertiles of the immune score (Hot = most inflamed third, Cold = least, Intermediate = middle).</a:t>
             </a:r>
             <a:br/>
             <a:br/>
             <a:r>
-              <a:rPr sz="1300" b="0">
+              <a:rPr sz="1100" b="0">
                 <a:solidFill>
                   <a:srgbClr val="1E293B"/>
                 </a:solidFill>
                 <a:latin typeface="Arial"/>
               </a:rPr>
-              <a:t>Hypothesis tests (per gene on COAD): Welch t (Hot vs Cold), one-way ANOVA (3 groups), Kruskal–Wallis, Mann–Whitney U, F-test of variances; clinical tables: χ². Multiple testing: Benjamini–Hochberg + Bonferroni on each p-value family.</a:t>
+              <a:t>Dimensionality reduction (04): PCA/ICA/MDS on scaled expression; t-SNE and UMAP computed in 2D (with PCA-based initialisation where applicable for stability). Plots coloured by immune label.</a:t>
             </a:r>
             <a:br/>
             <a:br/>
             <a:r>
-              <a:rPr sz="1300" b="0">
+              <a:rPr sz="1100" b="0">
                 <a:solidFill>
                   <a:srgbClr val="1E293B"/>
                 </a:solidFill>
                 <a:latin typeface="Arial"/>
               </a:rPr>
-              <a:t>ML: six pipelines with SelectKBest(ANOVA, k=500); stratified 5-fold CV; random_state = 42. Survival: Kaplan–Meier, multivariate log-rank, penalised Cox on ssGSEA scores, PLS regression (expression → survival time).</a:t>
-            </a:r>
-            <a:br/>
-            <a:br/>
-            <a:r>
-              <a:rPr sz="1300" b="0">
-                <a:solidFill>
-                  <a:srgbClr val="1E293B"/>
-                </a:solidFill>
-                <a:latin typeface="Arial"/>
-              </a:rPr>
-              <a:t>External validation: best CV model retrained on full COAD, evaluated on READ with aligned gene list.</a:t>
+              <a:t>Clustering (05): k-means for k=2…6 with silhouette sweep; agglomerative clustering with Ward linkage and dendrogram; DBSCAN on PCA coordinates. Cluster assignments compared to ssGSEA labels using Adjusted Rand Index and Adjusted Mutual Information.</a:t>
             </a:r>
           </a:p>
         </p:txBody>
@@ -7098,8 +8047,8 @@
         </p:nvSpPr>
         <p:spPr>
           <a:xfrm>
-            <a:off x="502920" y="6510528"/>
-            <a:ext cx="11185855" cy="256032"/>
+            <a:off x="608076" y="6528816"/>
+            <a:ext cx="11126419" cy="292608"/>
           </a:xfrm>
           <a:prstGeom prst="rect">
             <a:avLst/>
@@ -7107,20 +8056,20 @@
           <a:noFill/>
         </p:spPr>
         <p:txBody>
-          <a:bodyPr wrap="none">
-            <a:spAutoFit/>
+          <a:bodyPr wrap="square" lIns="38100" rIns="38100" tIns="25400" bIns="25400">
+            <a:noAutofit/>
           </a:bodyPr>
           <a:lstStyle/>
           <a:p>
             <a:pPr algn="l"/>
             <a:r>
-              <a:rPr sz="1000" b="0">
+              <a:rPr sz="900" b="0">
                 <a:solidFill>
                   <a:srgbClr val="64748B"/>
                 </a:solidFill>
                 <a:latin typeface="Arial"/>
               </a:rPr>
-              <a:t>Code annex: repository Python modules (attach per instructor format)</a:t>
+              <a:t>Random seed where applicable: 42</a:t>
             </a:r>
           </a:p>
         </p:txBody>
@@ -7152,7 +8101,7 @@
         <p:spPr>
           <a:xfrm>
             <a:off x="0" y="0"/>
-            <a:ext cx="82296" cy="6858000"/>
+            <a:ext cx="77724" cy="6858000"/>
           </a:xfrm>
           <a:prstGeom prst="rect">
             <a:avLst/>
@@ -7194,8 +8143,8 @@
         </p:nvSpPr>
         <p:spPr>
           <a:xfrm>
-            <a:off x="640080" y="411480"/>
-            <a:ext cx="11002975" cy="1005840"/>
+            <a:off x="608076" y="310896"/>
+            <a:ext cx="11126419" cy="804672"/>
           </a:xfrm>
           <a:prstGeom prst="rect">
             <a:avLst/>
@@ -7203,64 +8152,115 @@
           <a:noFill/>
         </p:spPr>
         <p:txBody>
-          <a:bodyPr wrap="square">
-            <a:spAutoFit/>
+          <a:bodyPr wrap="square" lIns="38100" rIns="38100" tIns="25400" bIns="25400">
+            <a:noAutofit/>
           </a:bodyPr>
           <a:lstStyle/>
           <a:p>
             <a:pPr algn="l"/>
             <a:r>
-              <a:rPr sz="2800" b="1">
+              <a:rPr sz="3000" b="1">
                 <a:solidFill>
                   <a:srgbClr val="1E293B"/>
                 </a:solidFill>
                 <a:latin typeface="Arial"/>
               </a:rPr>
-              <a:t>Preprocessing &amp; distributional checks</a:t>
+              <a:t>Methods (2/2)</a:t>
             </a:r>
           </a:p>
           <a:p>
             <a:pPr>
+              <a:lnSpc>
+                <a:spcPct val="108000"/>
+              </a:lnSpc>
               <a:spcBef>
-                <a:spcPts val="600"/>
+                <a:spcPts val="400"/>
               </a:spcBef>
             </a:pPr>
             <a:r>
-              <a:rPr sz="1300" b="0">
+              <a:rPr sz="1200" b="0">
                 <a:solidFill>
                   <a:srgbClr val="64748B"/>
                 </a:solidFill>
                 <a:latin typeface="Arial"/>
               </a:rPr>
-              <a:t>log₂(CPM+1) · filter ≥1.0 CPM in ≥20% samples</a:t>
-            </a:r>
-          </a:p>
-        </p:txBody>
-      </p:sp>
-      <p:pic>
-        <p:nvPicPr>
-          <p:cNvPr id="4" name="Picture 3" descr="dist_check_TCGA-COAD.png"/>
-          <p:cNvPicPr>
-            <a:picLocks noChangeAspect="1"/>
-          </p:cNvPicPr>
-          <p:nvPr/>
-        </p:nvPicPr>
-        <p:blipFill>
-          <a:blip r:embed="rId2"/>
-          <a:stretch>
-            <a:fillRect/>
-          </a:stretch>
-        </p:blipFill>
-        <p:spPr>
-          <a:xfrm>
-            <a:off x="612648" y="1115568"/>
-            <a:ext cx="11076127" cy="3866768"/>
-          </a:xfrm>
-          <a:prstGeom prst="rect">
-            <a:avLst/>
-          </a:prstGeom>
-        </p:spPr>
-      </p:pic>
+              <a:t>Hypothesis tests, ML, survival, external validation</a:t>
+            </a:r>
+          </a:p>
+        </p:txBody>
+      </p:sp>
+      <p:sp>
+        <p:nvSpPr>
+          <p:cNvPr id="4" name="TextBox 3"/>
+          <p:cNvSpPr txBox="1"/>
+          <p:nvPr/>
+        </p:nvSpPr>
+        <p:spPr>
+          <a:xfrm>
+            <a:off x="608076" y="1078992"/>
+            <a:ext cx="11126419" cy="5404104"/>
+          </a:xfrm>
+          <a:prstGeom prst="rect">
+            <a:avLst/>
+          </a:prstGeom>
+          <a:noFill/>
+        </p:spPr>
+        <p:txBody>
+          <a:bodyPr wrap="square" lIns="38100" rIns="38100" tIns="25400" bIns="25400">
+            <a:noAutofit/>
+          </a:bodyPr>
+          <a:lstStyle/>
+          <a:p>
+            <a:pPr algn="l">
+              <a:lnSpc>
+                <a:spcPct val="112000"/>
+              </a:lnSpc>
+            </a:pPr>
+            <a:r>
+              <a:rPr sz="1100" b="0">
+                <a:solidFill>
+                  <a:srgbClr val="1E293B"/>
+                </a:solidFill>
+                <a:latin typeface="Arial"/>
+              </a:rPr>
+              <a:t>Hypothesis testing (06): for each gene — Welch two-sample t (Hot vs Cold), one-way ANOVA across three groups, Kruskal–Wallis, Mann–Whitney U, and F-test of variance; p-values adjusted with Benjamini–Hochberg FDR and Bonferroni per family. High-confidence differential expression: BH q&lt;0.05 on t-test plus |log₂ fold-change|&gt;1. Clinical categorical fields tested with Pearson χ² vs label where applicable.</a:t>
+            </a:r>
+            <a:br/>
+            <a:br/>
+            <a:r>
+              <a:rPr sz="1100" b="0">
+                <a:solidFill>
+                  <a:srgbClr val="1E293B"/>
+                </a:solidFill>
+                <a:latin typeface="Arial"/>
+              </a:rPr>
+              <a:t>Classification (07): six sklearn Pipelines with StandardScaler (except tree/boosting paths), SelectKBest(f_classif, k=500), and classifier; stratified 5-fold CV; metrics include accuracy, balanced accuracy, and macro-averaged F1. Best model by mean balanced accuracy used for external export.</a:t>
+            </a:r>
+            <a:br/>
+            <a:br/>
+            <a:r>
+              <a:rPr sz="1100" b="0">
+                <a:solidFill>
+                  <a:srgbClr val="1E293B"/>
+                </a:solidFill>
+                <a:latin typeface="Arial"/>
+              </a:rPr>
+              <a:t>Survival (08): time from days_to_death or days_to_last_follow_up; event from vital_status. Kaplan–Meier by label, multivariate log-rank, L2-penalised Cox on ssGSEA cell-type scores, PLS regression of expression against survival time on training samples.</a:t>
+            </a:r>
+            <a:br/>
+            <a:br/>
+            <a:r>
+              <a:rPr sz="1100" b="0">
+                <a:solidFill>
+                  <a:srgbClr val="1E293B"/>
+                </a:solidFill>
+                <a:latin typeface="Arial"/>
+              </a:rPr>
+              <a:t>External validation (09): re-fit winning pipeline on all COAD samples; predict on READ with identical feature ordering; report confusion matrix, accuracy, balanced accuracy, macro-F1.</a:t>
+            </a:r>
+          </a:p>
+        </p:txBody>
+      </p:sp>
       <p:sp>
         <p:nvSpPr>
           <p:cNvPr id="5" name="TextBox 4"/>
@@ -7269,8 +8269,8 @@
         </p:nvSpPr>
         <p:spPr>
           <a:xfrm>
-            <a:off x="502920" y="6510528"/>
-            <a:ext cx="11185855" cy="256032"/>
+            <a:off x="608076" y="6528816"/>
+            <a:ext cx="11126419" cy="292608"/>
           </a:xfrm>
           <a:prstGeom prst="rect">
             <a:avLst/>
@@ -7278,20 +8278,20 @@
           <a:noFill/>
         </p:spPr>
         <p:txBody>
-          <a:bodyPr wrap="none">
-            <a:spAutoFit/>
+          <a:bodyPr wrap="square" lIns="38100" rIns="38100" tIns="25400" bIns="25400">
+            <a:noAutofit/>
           </a:bodyPr>
           <a:lstStyle/>
           <a:p>
             <a:pPr algn="l"/>
             <a:r>
-              <a:rPr sz="1000" b="0">
+              <a:rPr sz="900" b="0">
                 <a:solidFill>
                   <a:srgbClr val="64748B"/>
                 </a:solidFill>
                 <a:latin typeface="Arial"/>
               </a:rPr>
-              <a:t>QQ / histogram panels justify parametric tests alongside non-parametric checks</a:t>
+              <a:t>Code annex: attach repository or zip of .py files per instructor instructions</a:t>
             </a:r>
           </a:p>
         </p:txBody>
@@ -7323,7 +8323,7 @@
         <p:spPr>
           <a:xfrm>
             <a:off x="0" y="0"/>
-            <a:ext cx="82296" cy="6858000"/>
+            <a:ext cx="77724" cy="6858000"/>
           </a:xfrm>
           <a:prstGeom prst="rect">
             <a:avLst/>
@@ -7365,8 +8365,8 @@
         </p:nvSpPr>
         <p:spPr>
           <a:xfrm>
-            <a:off x="640080" y="411480"/>
-            <a:ext cx="11002975" cy="1005840"/>
+            <a:off x="608076" y="310896"/>
+            <a:ext cx="11126419" cy="804672"/>
           </a:xfrm>
           <a:prstGeom prst="rect">
             <a:avLst/>
@@ -7374,43 +8374,85 @@
           <a:noFill/>
         </p:spPr>
         <p:txBody>
-          <a:bodyPr wrap="square">
-            <a:spAutoFit/>
+          <a:bodyPr wrap="square" lIns="38100" rIns="38100" tIns="25400" bIns="25400">
+            <a:noAutofit/>
           </a:bodyPr>
           <a:lstStyle/>
           <a:p>
             <a:pPr algn="l"/>
             <a:r>
-              <a:rPr sz="2800" b="1">
+              <a:rPr sz="3000" b="1">
                 <a:solidFill>
                   <a:srgbClr val="1E293B"/>
                 </a:solidFill>
                 <a:latin typeface="Arial"/>
               </a:rPr>
-              <a:t>Immune scoring &amp; phenotype labels</a:t>
+              <a:t>Quality control &amp; distributions</a:t>
             </a:r>
           </a:p>
           <a:p>
             <a:pPr>
+              <a:lnSpc>
+                <a:spcPct val="108000"/>
+              </a:lnSpc>
               <a:spcBef>
-                <a:spcPts val="600"/>
+                <a:spcPts val="400"/>
               </a:spcBef>
             </a:pPr>
             <a:r>
-              <a:rPr sz="1300" b="0">
+              <a:rPr sz="1200" b="0">
                 <a:solidFill>
                   <a:srgbClr val="64748B"/>
                 </a:solidFill>
                 <a:latin typeface="Arial"/>
               </a:rPr>
-              <a:t>ssGSEA gene sets + ESTIMATE · tertile labels</a:t>
+              <a:t>Random genes · histogram + QQ after log-transform</a:t>
+            </a:r>
+          </a:p>
+        </p:txBody>
+      </p:sp>
+      <p:sp>
+        <p:nvSpPr>
+          <p:cNvPr id="4" name="TextBox 3"/>
+          <p:cNvSpPr txBox="1"/>
+          <p:nvPr/>
+        </p:nvSpPr>
+        <p:spPr>
+          <a:xfrm>
+            <a:off x="608076" y="1078992"/>
+            <a:ext cx="11126419" cy="868680"/>
+          </a:xfrm>
+          <a:prstGeom prst="rect">
+            <a:avLst/>
+          </a:prstGeom>
+          <a:noFill/>
+        </p:spPr>
+        <p:txBody>
+          <a:bodyPr wrap="square" lIns="38100" rIns="38100" tIns="25400" bIns="25400">
+            <a:noAutofit/>
+          </a:bodyPr>
+          <a:lstStyle/>
+          <a:p>
+            <a:pPr algn="l">
+              <a:lnSpc>
+                <a:spcPct val="112000"/>
+              </a:lnSpc>
+            </a:pPr>
+            <a:r>
+              <a:rPr sz="1100" b="0">
+                <a:solidFill>
+                  <a:srgbClr val="1E293B"/>
+                </a:solidFill>
+                <a:latin typeface="Arial"/>
+              </a:rPr>
+              <a:t>Before relying on t-tests and ANOVA we inspect marginal distributions. Histograms should be unimodal and roughly bell-shaped; QQ-plots should follow the diagonal if normality holds approximately. We still report Kruskal–Wallis and Mann–Whitney as distribution-robust companions to parametric tests.</a:t>
             </a:r>
           </a:p>
         </p:txBody>
       </p:sp>
       <p:pic>
         <p:nvPicPr>
-          <p:cNvPr id="4" name="Picture 3" descr="TCGA-COAD_ESTIMATE_Immune_hist.png"/>
+          <p:cNvPr id="5" name="Picture 4" descr="dist_check_TCGA-COAD.png"/>
           <p:cNvPicPr>
             <a:picLocks noChangeAspect="1"/>
           </p:cNvPicPr>
@@ -7424,64 +8466,14 @@
         </p:blipFill>
         <p:spPr>
           <a:xfrm>
-            <a:off x="594360" y="1097280"/>
-            <a:ext cx="5852160" cy="3560191"/>
+            <a:off x="608076" y="2002536"/>
+            <a:ext cx="11089843" cy="3871556"/>
           </a:xfrm>
           <a:prstGeom prst="rect">
             <a:avLst/>
           </a:prstGeom>
         </p:spPr>
       </p:pic>
-      <p:sp>
-        <p:nvSpPr>
-          <p:cNvPr id="5" name="TextBox 4"/>
-          <p:cNvSpPr txBox="1"/>
-          <p:nvPr/>
-        </p:nvSpPr>
-        <p:spPr>
-          <a:xfrm>
-            <a:off x="6583680" y="1234440"/>
-            <a:ext cx="5394960" cy="5029200"/>
-          </a:xfrm>
-          <a:prstGeom prst="rect">
-            <a:avLst/>
-          </a:prstGeom>
-          <a:noFill/>
-        </p:spPr>
-        <p:txBody>
-          <a:bodyPr wrap="none">
-            <a:spAutoFit/>
-          </a:bodyPr>
-          <a:lstStyle/>
-          <a:p>
-            <a:pPr algn="l">
-              <a:lnSpc>
-                <a:spcPct val="115000"/>
-              </a:lnSpc>
-            </a:pPr>
-            <a:r>
-              <a:rPr sz="1400" b="0">
-                <a:solidFill>
-                  <a:srgbClr val="1E293B"/>
-                </a:solidFill>
-                <a:latin typeface="Arial"/>
-              </a:rPr>
-              <a:t>Each bar stack shows how ESTIMATE immune scores distribute within Hot (red), Intermediate (grey), and Cold (blue) tertiles.</a:t>
-            </a:r>
-            <a:br/>
-            <a:br/>
-            <a:r>
-              <a:rPr sz="1400" b="0">
-                <a:solidFill>
-                  <a:srgbClr val="1E293B"/>
-                </a:solidFill>
-                <a:latin typeface="Arial"/>
-              </a:rPr>
-              <a:t>This step replaces expensive multiplex IHC with a transparent, reproducible omics-based proxy — we interpret all downstream statistics as agreement with this immune ranking, not with pathology gold standard.</a:t>
-            </a:r>
-          </a:p>
-        </p:txBody>
-      </p:sp>
       <p:sp>
         <p:nvSpPr>
           <p:cNvPr id="6" name="TextBox 5"/>
@@ -7490,8 +8482,8 @@
         </p:nvSpPr>
         <p:spPr>
           <a:xfrm>
-            <a:off x="502920" y="6510528"/>
-            <a:ext cx="11185855" cy="256032"/>
+            <a:off x="608076" y="6528816"/>
+            <a:ext cx="11126419" cy="292608"/>
           </a:xfrm>
           <a:prstGeom prst="rect">
             <a:avLst/>
@@ -7499,20 +8491,20 @@
           <a:noFill/>
         </p:spPr>
         <p:txBody>
-          <a:bodyPr wrap="none">
-            <a:spAutoFit/>
+          <a:bodyPr wrap="square" lIns="38100" rIns="38100" tIns="25400" bIns="25400">
+            <a:noAutofit/>
           </a:bodyPr>
           <a:lstStyle/>
           <a:p>
             <a:pPr algn="l"/>
             <a:r>
-              <a:rPr sz="1000" b="0">
+              <a:rPr sz="900" b="0">
                 <a:solidFill>
                   <a:srgbClr val="64748B"/>
                 </a:solidFill>
                 <a:latin typeface="Arial"/>
               </a:rPr>
-              <a:t>Outputs: labels_TCGA-*.csv, immune_scores_TCGA-*.csv</a:t>
+              <a:t>outputs/figures/preprocessing/dist_check_TCGA-COAD.png</a:t>
             </a:r>
           </a:p>
         </p:txBody>
@@ -7544,7 +8536,7 @@
         <p:spPr>
           <a:xfrm>
             <a:off x="0" y="0"/>
-            <a:ext cx="82296" cy="6858000"/>
+            <a:ext cx="77724" cy="6858000"/>
           </a:xfrm>
           <a:prstGeom prst="rect">
             <a:avLst/>
@@ -7586,8 +8578,8 @@
         </p:nvSpPr>
         <p:spPr>
           <a:xfrm>
-            <a:off x="640080" y="411480"/>
-            <a:ext cx="11002975" cy="1005840"/>
+            <a:off x="608076" y="310896"/>
+            <a:ext cx="11126419" cy="804672"/>
           </a:xfrm>
           <a:prstGeom prst="rect">
             <a:avLst/>
@@ -7595,43 +8587,135 @@
           <a:noFill/>
         </p:spPr>
         <p:txBody>
-          <a:bodyPr wrap="square">
-            <a:spAutoFit/>
+          <a:bodyPr wrap="square" lIns="38100" rIns="38100" tIns="25400" bIns="25400">
+            <a:noAutofit/>
           </a:bodyPr>
           <a:lstStyle/>
           <a:p>
             <a:pPr algn="l"/>
             <a:r>
-              <a:rPr sz="2800" b="1">
+              <a:rPr sz="3000" b="1">
                 <a:solidFill>
                   <a:srgbClr val="1E293B"/>
                 </a:solidFill>
                 <a:latin typeface="Arial"/>
               </a:rPr>
-              <a:t>Dimensionality reduction (TCGA-COAD)</a:t>
+              <a:t>Immune scores and phenotype labels</a:t>
             </a:r>
           </a:p>
           <a:p>
             <a:pPr>
+              <a:lnSpc>
+                <a:spcPct val="108000"/>
+              </a:lnSpc>
               <a:spcBef>
-                <a:spcPts val="600"/>
+                <a:spcPts val="400"/>
               </a:spcBef>
             </a:pPr>
             <a:r>
-              <a:rPr sz="1300" b="0">
+              <a:rPr sz="1200" b="0">
                 <a:solidFill>
                   <a:srgbClr val="64748B"/>
                 </a:solidFill>
                 <a:latin typeface="Arial"/>
               </a:rPr>
-              <a:t>PC1 = 32.5% variance · PC2 = 9.4% · PC1+PC2 = 42.0%</a:t>
+              <a:t>ESTIMATE immune score by tertile class</a:t>
+            </a:r>
+          </a:p>
+        </p:txBody>
+      </p:sp>
+      <p:sp>
+        <p:nvSpPr>
+          <p:cNvPr id="4" name="TextBox 3"/>
+          <p:cNvSpPr txBox="1"/>
+          <p:nvPr/>
+        </p:nvSpPr>
+        <p:spPr>
+          <a:xfrm>
+            <a:off x="6226149" y="1078992"/>
+            <a:ext cx="5508345" cy="960120"/>
+          </a:xfrm>
+          <a:prstGeom prst="rect">
+            <a:avLst/>
+          </a:prstGeom>
+          <a:noFill/>
+        </p:spPr>
+        <p:txBody>
+          <a:bodyPr wrap="square" lIns="38100" rIns="38100" tIns="25400" bIns="25400">
+            <a:noAutofit/>
+          </a:bodyPr>
+          <a:lstStyle/>
+          <a:p>
+            <a:pPr algn="l">
+              <a:lnSpc>
+                <a:spcPct val="112000"/>
+              </a:lnSpc>
+            </a:pPr>
+            <a:r>
+              <a:rPr sz="1100" b="0">
+                <a:solidFill>
+                  <a:srgbClr val="1E293B"/>
+                </a:solidFill>
+                <a:latin typeface="Arial"/>
+              </a:rPr>
+              <a:t>Tertile split enforces comparable class sizes and mirrors common practice when no external gold standard exists. Hot tumours concentrate at high ESTIMATE immune scores; Cold at low scores.</a:t>
+            </a:r>
+          </a:p>
+        </p:txBody>
+      </p:sp>
+      <p:sp>
+        <p:nvSpPr>
+          <p:cNvPr id="5" name="TextBox 4"/>
+          <p:cNvSpPr txBox="1"/>
+          <p:nvPr/>
+        </p:nvSpPr>
+        <p:spPr>
+          <a:xfrm>
+            <a:off x="6226149" y="2103120"/>
+            <a:ext cx="5508345" cy="4379976"/>
+          </a:xfrm>
+          <a:prstGeom prst="rect">
+            <a:avLst/>
+          </a:prstGeom>
+          <a:noFill/>
+        </p:spPr>
+        <p:txBody>
+          <a:bodyPr wrap="square" lIns="38100" rIns="38100" tIns="25400" bIns="25400">
+            <a:noAutofit/>
+          </a:bodyPr>
+          <a:lstStyle/>
+          <a:p>
+            <a:pPr algn="l">
+              <a:lnSpc>
+                <a:spcPct val="112000"/>
+              </a:lnSpc>
+            </a:pPr>
+            <a:r>
+              <a:rPr sz="1100" b="0">
+                <a:solidFill>
+                  <a:srgbClr val="1E293B"/>
+                </a:solidFill>
+                <a:latin typeface="Arial"/>
+              </a:rPr>
+              <a:t>Interpretation caveat: labels are algorithm-defined (ssGSEA + ESTIMATE), not pathologist-verified IHC. All supervised metrics therefore measure agreement with this omics-based proxy. That is still scientifically useful: it tests whether linear and non-linear expression structure recovers immune ranking learned from gene-set enrichment.</a:t>
+            </a:r>
+            <a:br/>
+            <a:br/>
+            <a:r>
+              <a:rPr sz="1100" b="0">
+                <a:solidFill>
+                  <a:srgbClr val="1E293B"/>
+                </a:solidFill>
+                <a:latin typeface="Arial"/>
+              </a:rPr>
+              <a:t>Outputs drive every later step: merged with expression for DE, fed into PCA colours, used as clustering reference for ARI/AMI, and used as y in classification.</a:t>
             </a:r>
           </a:p>
         </p:txBody>
       </p:sp>
       <p:pic>
         <p:nvPicPr>
-          <p:cNvPr id="4" name="Picture 3" descr="TCGA-COAD_pca.png"/>
+          <p:cNvPr id="6" name="Picture 5" descr="TCGA-COAD_ESTIMATE_Immune_hist.png"/>
           <p:cNvPicPr>
             <a:picLocks noChangeAspect="1"/>
           </p:cNvPicPr>
@@ -7645,48 +8729,24 @@
         </p:blipFill>
         <p:spPr>
           <a:xfrm>
-            <a:off x="576072" y="1078992"/>
-            <a:ext cx="5423763" cy="4430974"/>
+            <a:off x="608076" y="1078992"/>
+            <a:ext cx="5471769" cy="3328778"/>
           </a:xfrm>
           <a:prstGeom prst="rect">
             <a:avLst/>
           </a:prstGeom>
         </p:spPr>
       </p:pic>
-      <p:pic>
-        <p:nvPicPr>
-          <p:cNvPr id="5" name="Picture 4" descr="TCGA-COAD_umap.png"/>
-          <p:cNvPicPr>
-            <a:picLocks noChangeAspect="1"/>
-          </p:cNvPicPr>
-          <p:nvPr/>
-        </p:nvPicPr>
-        <p:blipFill>
-          <a:blip r:embed="rId3"/>
-          <a:stretch>
-            <a:fillRect/>
-          </a:stretch>
-        </p:blipFill>
-        <p:spPr>
-          <a:xfrm>
-            <a:off x="6091275" y="1078992"/>
-            <a:ext cx="5423763" cy="4603955"/>
-          </a:xfrm>
-          <a:prstGeom prst="rect">
-            <a:avLst/>
-          </a:prstGeom>
-        </p:spPr>
-      </p:pic>
-      <p:sp>
-        <p:nvSpPr>
-          <p:cNvPr id="6" name="TextBox 5"/>
+      <p:sp>
+        <p:nvSpPr>
+          <p:cNvPr id="7" name="TextBox 6"/>
           <p:cNvSpPr txBox="1"/>
           <p:nvPr/>
         </p:nvSpPr>
         <p:spPr>
           <a:xfrm>
-            <a:off x="502920" y="6510528"/>
-            <a:ext cx="11185855" cy="256032"/>
+            <a:off x="608076" y="6528816"/>
+            <a:ext cx="11126419" cy="292608"/>
           </a:xfrm>
           <a:prstGeom prst="rect">
             <a:avLst/>
@@ -7694,20 +8754,20 @@
           <a:noFill/>
         </p:spPr>
         <p:txBody>
-          <a:bodyPr wrap="none">
-            <a:spAutoFit/>
+          <a:bodyPr wrap="square" lIns="38100" rIns="38100" tIns="25400" bIns="25400">
+            <a:noAutofit/>
           </a:bodyPr>
           <a:lstStyle/>
           <a:p>
             <a:pPr algn="l"/>
             <a:r>
-              <a:rPr sz="1000" b="0">
+              <a:rPr sz="900" b="0">
                 <a:solidFill>
                   <a:srgbClr val="64748B"/>
                 </a:solidFill>
                 <a:latin typeface="Arial"/>
               </a:rPr>
-              <a:t>Also computed: ICA, metric/non-metric MDS, t-SNE (figures in outputs/figures/dim_reduction/)</a:t>
+              <a:t>outputs/tables/labels_TCGA-COAD.csv · immune_scores_TCGA-COAD.csv</a:t>
             </a:r>
           </a:p>
         </p:txBody>
